--- a/presentations/kitajskaya-filosofiya/out/kitajskaya-filosofiya.pptx
+++ b/presentations/kitajskaya-filosofiya/out/kitajskaya-filosofiya.pptx
@@ -5105,9 +5105,7 @@
             <a:avLst/>
           </a:prstGeom>
           <a:solidFill>
-            <a:srgbClr val="EDE9E1">
-              <a:alpha val="96000"/>
-            </a:srgbClr>
+            <a:srgbClr val="EDE9E1"/>
           </a:solidFill>
           <a:ln>
             <a:noFill/>
@@ -5213,7 +5211,6 @@
                   <a:srgbClr val="8A8578"/>
                 </a:solidFill>
                 <a:latin typeface="Arial"/>
-                <a:ea typeface="Microsoft YaHei"/>
               </a:rPr>
               <a:t>ФИЛОСОФИЯ ДРЕВНЕГО КИТАЯ</a:t>
             </a:r>
@@ -5253,7 +5250,6 @@
                   <a:srgbClr val="2A2A24"/>
                 </a:solidFill>
                 <a:latin typeface="Arial"/>
-                <a:ea typeface="Microsoft YaHei"/>
               </a:rPr>
               <a:t>КИТАЙСКАЯ</a:t>
             </a:r>
@@ -5270,7 +5266,6 @@
                   <a:srgbClr val="2A2A24"/>
                 </a:solidFill>
                 <a:latin typeface="Arial"/>
-                <a:ea typeface="Microsoft YaHei"/>
               </a:rPr>
               <a:t>ФИЛОСОФИЯ</a:t>
             </a:r>
@@ -5354,7 +5349,6 @@
                   <a:srgbClr val="4A4942"/>
                 </a:solidFill>
                 <a:latin typeface="Arial"/>
-                <a:ea typeface="Microsoft YaHei"/>
               </a:rPr>
               <a:t>Даосизм и конфуцианство</a:t>
             </a:r>
@@ -5438,7 +5432,6 @@
                   <a:srgbClr val="4A4942"/>
                 </a:solidFill>
                 <a:latin typeface="Arial"/>
-                <a:ea typeface="Microsoft YaHei"/>
               </a:rPr>
               <a:t>«Не иди по течению, не иди против течения — иди поперёк него, если хочешь достичь берега.»</a:t>
             </a:r>
@@ -5453,7 +5446,7 @@
         </p:nvSpPr>
         <p:spPr>
           <a:xfrm>
-            <a:off x="7269480" y="4989385"/>
+            <a:off x="7269480" y="5135689"/>
             <a:ext cx="3931920" cy="274320"/>
           </a:xfrm>
           <a:prstGeom prst="rect">
@@ -5478,7 +5471,6 @@
                   <a:srgbClr val="8A8578"/>
                 </a:solidFill>
                 <a:latin typeface="Arial"/>
-                <a:ea typeface="Microsoft YaHei"/>
               </a:rPr>
               <a:t>СЛОВА ВАНТАЛЫ</a:t>
             </a:r>
@@ -5518,7 +5510,6 @@
                   <a:srgbClr val="8A8578"/>
                 </a:solidFill>
                 <a:latin typeface="Arial"/>
-                <a:ea typeface="Microsoft YaHei"/>
               </a:rPr>
               <a:t>VI—V вв. до н. э.</a:t>
             </a:r>
@@ -5558,7 +5549,6 @@
                   <a:srgbClr val="555750"/>
                 </a:solidFill>
                 <a:latin typeface="Arial"/>
-                <a:ea typeface="Microsoft YaHei"/>
               </a:rPr>
               <a:t>道</a:t>
             </a:r>
@@ -5578,7 +5568,6 @@
                   <a:srgbClr val="555750"/>
                 </a:solidFill>
                 <a:latin typeface="Arial"/>
-                <a:ea typeface="Microsoft YaHei"/>
               </a:rPr>
               <a:t>德</a:t>
             </a:r>
@@ -5660,7 +5649,6 @@
                   <a:srgbClr val="8A8578"/>
                 </a:solidFill>
                 <a:latin typeface="Arial"/>
-                <a:ea typeface="Microsoft YaHei"/>
               </a:rPr>
               <a:t>ПЕРЕЛОМ</a:t>
             </a:r>
@@ -5700,7 +5688,6 @@
                   <a:srgbClr val="2A2A24"/>
                 </a:solidFill>
                 <a:latin typeface="Arial"/>
-                <a:ea typeface="Microsoft YaHei"/>
               </a:rPr>
               <a:t>НОВОЕ ВРЕМЯ</a:t>
             </a:r>
@@ -5717,7 +5704,6 @@
                   <a:srgbClr val="2A2A24"/>
                 </a:solidFill>
                 <a:latin typeface="Arial"/>
-                <a:ea typeface="Microsoft YaHei"/>
               </a:rPr>
               <a:t>КИТАЙСКОЙ ФИЛОСОФИИ</a:t>
             </a:r>
@@ -5801,7 +5787,6 @@
                   <a:srgbClr val="2C382F"/>
                 </a:solidFill>
                 <a:latin typeface="Arial"/>
-                <a:ea typeface="Microsoft YaHei"/>
               </a:rPr>
               <a:t>с 1000 года н. э.</a:t>
             </a:r>
@@ -5841,7 +5826,6 @@
                   <a:srgbClr val="8C7B5F"/>
                 </a:solidFill>
                 <a:latin typeface="Arial"/>
-                <a:ea typeface="Microsoft YaHei"/>
               </a:rPr>
               <a:t>—</a:t>
             </a:r>
@@ -5881,7 +5865,6 @@
                   <a:srgbClr val="2A2A24"/>
                 </a:solidFill>
                 <a:latin typeface="Arial"/>
-                <a:ea typeface="Microsoft YaHei"/>
               </a:rPr>
               <a:t>Ослабевает интерес к философии Дао</a:t>
             </a:r>
@@ -5921,7 +5904,6 @@
                   <a:srgbClr val="8C7B5F"/>
                 </a:solidFill>
                 <a:latin typeface="Arial"/>
-                <a:ea typeface="Microsoft YaHei"/>
               </a:rPr>
               <a:t>—</a:t>
             </a:r>
@@ -5961,7 +5943,6 @@
                   <a:srgbClr val="2A2A24"/>
                 </a:solidFill>
                 <a:latin typeface="Arial"/>
-                <a:ea typeface="Microsoft YaHei"/>
               </a:rPr>
               <a:t>Догматизация конфуцианства — до религиозного почитания учения и его основателя</a:t>
             </a:r>
@@ -6001,7 +5982,6 @@
                   <a:srgbClr val="8C7B5F"/>
                 </a:solidFill>
                 <a:latin typeface="Arial"/>
-                <a:ea typeface="Microsoft YaHei"/>
               </a:rPr>
               <a:t>—</a:t>
             </a:r>
@@ -6041,7 +6021,6 @@
                   <a:srgbClr val="2A2A24"/>
                 </a:solidFill>
                 <a:latin typeface="Arial"/>
-                <a:ea typeface="Microsoft YaHei"/>
               </a:rPr>
               <a:t>Проникновение в Китай буддизма и христианства</a:t>
             </a:r>
@@ -6194,7 +6173,6 @@
                   <a:srgbClr val="2C382F"/>
                 </a:solidFill>
                 <a:latin typeface="Arial"/>
-                <a:ea typeface="Microsoft YaHei"/>
               </a:rPr>
               <a:t>Конфуцианство надолго становится главной государственной идеологией</a:t>
             </a:r>
@@ -6234,7 +6212,6 @@
                   <a:srgbClr val="8A8578"/>
                 </a:solidFill>
                 <a:latin typeface="Arial"/>
-                <a:ea typeface="Microsoft YaHei"/>
               </a:rPr>
               <a:t>ПЕРЕЛОМ</a:t>
             </a:r>
@@ -6274,7 +6251,6 @@
                   <a:srgbClr val="8A8578"/>
                 </a:solidFill>
                 <a:latin typeface="Arial"/>
-                <a:ea typeface="Microsoft YaHei"/>
               </a:rPr>
               <a:t>10</a:t>
             </a:r>
@@ -6356,7 +6332,6 @@
                   <a:srgbClr val="3B493D"/>
                 </a:solidFill>
                 <a:latin typeface="Arial"/>
-                <a:ea typeface="Microsoft YaHei"/>
               </a:rPr>
               <a:t>儒</a:t>
             </a:r>
@@ -6396,7 +6371,6 @@
                   <a:srgbClr val="9AA697"/>
                 </a:solidFill>
                 <a:latin typeface="Arial"/>
-                <a:ea typeface="Microsoft YaHei"/>
               </a:rPr>
               <a:t>ЧАСТЬ ВТОРАЯ</a:t>
             </a:r>
@@ -6436,7 +6410,6 @@
                   <a:srgbClr val="EDE9E1"/>
                 </a:solidFill>
                 <a:latin typeface="Arial"/>
-                <a:ea typeface="Microsoft YaHei"/>
               </a:rPr>
               <a:t>КОНФУЦИАНСТВО</a:t>
             </a:r>
@@ -6520,7 +6493,6 @@
                   <a:srgbClr val="C2CBBF"/>
                 </a:solidFill>
                 <a:latin typeface="Arial"/>
-                <a:ea typeface="Microsoft YaHei"/>
               </a:rPr>
               <a:t>Кун Цю · 551—479 гг. до н. э.</a:t>
             </a:r>
@@ -6560,7 +6532,6 @@
                   <a:srgbClr val="8C7B5F"/>
                 </a:solidFill>
                 <a:latin typeface="Arial"/>
-                <a:ea typeface="Microsoft YaHei"/>
               </a:rPr>
               <a:t>—</a:t>
             </a:r>
@@ -6600,7 +6571,6 @@
                   <a:srgbClr val="D3D8CF"/>
                 </a:solidFill>
                 <a:latin typeface="Arial"/>
-                <a:ea typeface="Microsoft YaHei"/>
               </a:rPr>
               <a:t>Конфуций: биография</a:t>
             </a:r>
@@ -6640,7 +6610,6 @@
                   <a:srgbClr val="8C7B5F"/>
                 </a:solidFill>
                 <a:latin typeface="Arial"/>
-                <a:ea typeface="Microsoft YaHei"/>
               </a:rPr>
               <a:t>—</a:t>
             </a:r>
@@ -6680,7 +6649,6 @@
                   <a:srgbClr val="D3D8CF"/>
                 </a:solidFill>
                 <a:latin typeface="Arial"/>
-                <a:ea typeface="Microsoft YaHei"/>
               </a:rPr>
               <a:t>Знание и природа человека</a:t>
             </a:r>
@@ -6720,7 +6688,6 @@
                   <a:srgbClr val="8C7B5F"/>
                 </a:solidFill>
                 <a:latin typeface="Arial"/>
-                <a:ea typeface="Microsoft YaHei"/>
               </a:rPr>
               <a:t>—</a:t>
             </a:r>
@@ -6760,7 +6727,6 @@
                   <a:srgbClr val="D3D8CF"/>
                 </a:solidFill>
                 <a:latin typeface="Arial"/>
-                <a:ea typeface="Microsoft YaHei"/>
               </a:rPr>
               <a:t>Благородный муж</a:t>
             </a:r>
@@ -6800,7 +6766,6 @@
                   <a:srgbClr val="8C7B5F"/>
                 </a:solidFill>
                 <a:latin typeface="Arial"/>
-                <a:ea typeface="Microsoft YaHei"/>
               </a:rPr>
               <a:t>—</a:t>
             </a:r>
@@ -6840,7 +6805,6 @@
                   <a:srgbClr val="D3D8CF"/>
                 </a:solidFill>
                 <a:latin typeface="Arial"/>
-                <a:ea typeface="Microsoft YaHei"/>
               </a:rPr>
               <a:t>Государство</a:t>
             </a:r>
@@ -6880,7 +6844,6 @@
                   <a:srgbClr val="B9C2B6"/>
                 </a:solidFill>
                 <a:latin typeface="Arial"/>
-                <a:ea typeface="Microsoft YaHei"/>
               </a:rPr>
               <a:t>КОНФУЦИАНСТВО</a:t>
             </a:r>
@@ -6920,7 +6883,6 @@
                   <a:srgbClr val="B9C2B6"/>
                 </a:solidFill>
                 <a:latin typeface="Arial"/>
-                <a:ea typeface="Microsoft YaHei"/>
               </a:rPr>
               <a:t>11</a:t>
             </a:r>
@@ -7002,7 +6964,6 @@
                   <a:srgbClr val="8A8578"/>
                 </a:solidFill>
                 <a:latin typeface="Arial"/>
-                <a:ea typeface="Microsoft YaHei"/>
               </a:rPr>
               <a:t>КОНФУЦИАНСТВО</a:t>
             </a:r>
@@ -7042,7 +7003,6 @@
                   <a:srgbClr val="2A2A24"/>
                 </a:solidFill>
                 <a:latin typeface="Arial"/>
-                <a:ea typeface="Microsoft YaHei"/>
               </a:rPr>
               <a:t>КОНФУЦИЙ: БИОГРАФИЯ</a:t>
             </a:r>
@@ -7126,7 +7086,6 @@
                   <a:srgbClr val="2C382F"/>
                 </a:solidFill>
                 <a:latin typeface="Arial"/>
-                <a:ea typeface="Microsoft YaHei"/>
               </a:rPr>
               <a:t>Кун Цю — в литературе Кун-цзы, Кун Фу-цзы или просто Цзы, «Учитель»</a:t>
             </a:r>
@@ -7166,7 +7125,6 @@
                   <a:srgbClr val="8C7B5F"/>
                 </a:solidFill>
                 <a:latin typeface="Arial"/>
-                <a:ea typeface="Microsoft YaHei"/>
               </a:rPr>
               <a:t>—</a:t>
             </a:r>
@@ -7206,7 +7164,6 @@
                   <a:srgbClr val="2A2A24"/>
                 </a:solidFill>
                 <a:latin typeface="Arial"/>
-                <a:ea typeface="Microsoft YaHei"/>
               </a:rPr>
               <a:t>Потомок обедневшего аристократического рода</a:t>
             </a:r>
@@ -7246,7 +7203,6 @@
                   <a:srgbClr val="8C7B5F"/>
                 </a:solidFill>
                 <a:latin typeface="Arial"/>
-                <a:ea typeface="Microsoft YaHei"/>
               </a:rPr>
               <a:t>—</a:t>
             </a:r>
@@ -7286,7 +7242,6 @@
                   <a:srgbClr val="2A2A24"/>
                 </a:solidFill>
                 <a:latin typeface="Arial"/>
-                <a:ea typeface="Microsoft YaHei"/>
               </a:rPr>
               <a:t>Сын пожилого чиновника и его молодой наложницы</a:t>
             </a:r>
@@ -7326,7 +7281,6 @@
                   <a:srgbClr val="8C7B5F"/>
                 </a:solidFill>
                 <a:latin typeface="Arial"/>
-                <a:ea typeface="Microsoft YaHei"/>
               </a:rPr>
               <a:t>—</a:t>
             </a:r>
@@ -7366,7 +7320,6 @@
                   <a:srgbClr val="2A2A24"/>
                 </a:solidFill>
                 <a:latin typeface="Arial"/>
-                <a:ea typeface="Microsoft YaHei"/>
               </a:rPr>
               <a:t>В 22 года — первый частный учитель Китая</a:t>
             </a:r>
@@ -7406,7 +7359,6 @@
                   <a:srgbClr val="8C7B5F"/>
                 </a:solidFill>
                 <a:latin typeface="Arial"/>
-                <a:ea typeface="Microsoft YaHei"/>
               </a:rPr>
               <a:t>—</a:t>
             </a:r>
@@ -7446,7 +7398,6 @@
                   <a:srgbClr val="2A2A24"/>
                 </a:solidFill>
                 <a:latin typeface="Arial"/>
-                <a:ea typeface="Microsoft YaHei"/>
               </a:rPr>
               <a:t>Самый знаменитый педагог Поднебесной</a:t>
             </a:r>
@@ -7510,7 +7461,6 @@
                   <a:srgbClr val="8A8578"/>
                 </a:solidFill>
                 <a:latin typeface="Arial"/>
-                <a:ea typeface="Microsoft YaHei"/>
               </a:rPr>
               <a:t>Кун Цю (Конфуций), 551—479 гг. до н. э.</a:t>
             </a:r>
@@ -7638,7 +7588,6 @@
                   <a:srgbClr val="2C382F"/>
                 </a:solidFill>
                 <a:latin typeface="Arial"/>
-                <a:ea typeface="Microsoft YaHei"/>
               </a:rPr>
               <a:t>Он не любил говорить о себе и описал весь свой путь в шести строчках</a:t>
             </a:r>
@@ -7678,7 +7627,6 @@
                   <a:srgbClr val="8A8578"/>
                 </a:solidFill>
                 <a:latin typeface="Arial"/>
-                <a:ea typeface="Microsoft YaHei"/>
               </a:rPr>
               <a:t>КОНФУЦИАНСТВО</a:t>
             </a:r>
@@ -7718,7 +7666,6 @@
                   <a:srgbClr val="8A8578"/>
                 </a:solidFill>
                 <a:latin typeface="Arial"/>
-                <a:ea typeface="Microsoft YaHei"/>
               </a:rPr>
               <a:t>12</a:t>
             </a:r>
@@ -7800,7 +7747,6 @@
                   <a:srgbClr val="8A8578"/>
                 </a:solidFill>
                 <a:latin typeface="Arial"/>
-                <a:ea typeface="Microsoft YaHei"/>
               </a:rPr>
               <a:t>КОНФУЦИАНСТВО</a:t>
             </a:r>
@@ -7840,7 +7786,6 @@
                   <a:srgbClr val="2A2A24"/>
                 </a:solidFill>
                 <a:latin typeface="Arial"/>
-                <a:ea typeface="Microsoft YaHei"/>
               </a:rPr>
               <a:t>АВТОБИОГРАФИЯ В ШЕСТЬ СТРОК</a:t>
             </a:r>
@@ -7924,7 +7869,6 @@
                   <a:srgbClr val="2C382F"/>
                 </a:solidFill>
                 <a:latin typeface="Arial"/>
-                <a:ea typeface="Microsoft YaHei"/>
               </a:rPr>
               <a:t>15</a:t>
             </a:r>
@@ -7964,7 +7908,6 @@
                   <a:srgbClr val="8C7B5F"/>
                 </a:solidFill>
                 <a:latin typeface="Arial"/>
-                <a:ea typeface="Microsoft YaHei"/>
               </a:rPr>
               <a:t>лет</a:t>
             </a:r>
@@ -8048,7 +7991,6 @@
                   <a:srgbClr val="2A2A24"/>
                 </a:solidFill>
                 <a:latin typeface="Arial"/>
-                <a:ea typeface="Microsoft YaHei"/>
               </a:rPr>
               <a:t>обратил свои помыслы к учению</a:t>
             </a:r>
@@ -8088,7 +8030,6 @@
                   <a:srgbClr val="2C382F"/>
                 </a:solidFill>
                 <a:latin typeface="Arial"/>
-                <a:ea typeface="Microsoft YaHei"/>
               </a:rPr>
               <a:t>30</a:t>
             </a:r>
@@ -8128,7 +8069,6 @@
                   <a:srgbClr val="8C7B5F"/>
                 </a:solidFill>
                 <a:latin typeface="Arial"/>
-                <a:ea typeface="Microsoft YaHei"/>
               </a:rPr>
               <a:t>лет</a:t>
             </a:r>
@@ -8212,7 +8152,6 @@
                   <a:srgbClr val="2A2A24"/>
                 </a:solidFill>
                 <a:latin typeface="Arial"/>
-                <a:ea typeface="Microsoft YaHei"/>
               </a:rPr>
               <a:t>обрёл прочную основу</a:t>
             </a:r>
@@ -8252,7 +8191,6 @@
                   <a:srgbClr val="2C382F"/>
                 </a:solidFill>
                 <a:latin typeface="Arial"/>
-                <a:ea typeface="Microsoft YaHei"/>
               </a:rPr>
               <a:t>40</a:t>
             </a:r>
@@ -8292,7 +8230,6 @@
                   <a:srgbClr val="8C7B5F"/>
                 </a:solidFill>
                 <a:latin typeface="Arial"/>
-                <a:ea typeface="Microsoft YaHei"/>
               </a:rPr>
               <a:t>лет</a:t>
             </a:r>
@@ -8376,7 +8313,6 @@
                   <a:srgbClr val="2A2A24"/>
                 </a:solidFill>
                 <a:latin typeface="Arial"/>
-                <a:ea typeface="Microsoft YaHei"/>
               </a:rPr>
               <a:t>сумел освободиться от сомнений</a:t>
             </a:r>
@@ -8416,7 +8352,6 @@
                   <a:srgbClr val="2C382F"/>
                 </a:solidFill>
                 <a:latin typeface="Arial"/>
-                <a:ea typeface="Microsoft YaHei"/>
               </a:rPr>
               <a:t>50</a:t>
             </a:r>
@@ -8456,7 +8391,6 @@
                   <a:srgbClr val="8C7B5F"/>
                 </a:solidFill>
                 <a:latin typeface="Arial"/>
-                <a:ea typeface="Microsoft YaHei"/>
               </a:rPr>
               <a:t>лет</a:t>
             </a:r>
@@ -8540,7 +8474,6 @@
                   <a:srgbClr val="2A2A24"/>
                 </a:solidFill>
                 <a:latin typeface="Arial"/>
-                <a:ea typeface="Microsoft YaHei"/>
               </a:rPr>
               <a:t>познал волю Неба</a:t>
             </a:r>
@@ -8580,7 +8513,6 @@
                   <a:srgbClr val="2C382F"/>
                 </a:solidFill>
                 <a:latin typeface="Arial"/>
-                <a:ea typeface="Microsoft YaHei"/>
               </a:rPr>
               <a:t>60</a:t>
             </a:r>
@@ -8620,7 +8552,6 @@
                   <a:srgbClr val="8C7B5F"/>
                 </a:solidFill>
                 <a:latin typeface="Arial"/>
-                <a:ea typeface="Microsoft YaHei"/>
               </a:rPr>
               <a:t>лет</a:t>
             </a:r>
@@ -8704,7 +8635,6 @@
                   <a:srgbClr val="2A2A24"/>
                 </a:solidFill>
                 <a:latin typeface="Arial"/>
-                <a:ea typeface="Microsoft YaHei"/>
               </a:rPr>
               <a:t>научился отличать правду от лжи</a:t>
             </a:r>
@@ -8744,7 +8674,6 @@
                   <a:srgbClr val="2C382F"/>
                 </a:solidFill>
                 <a:latin typeface="Arial"/>
-                <a:ea typeface="Microsoft YaHei"/>
               </a:rPr>
               <a:t>70</a:t>
             </a:r>
@@ -8784,7 +8713,6 @@
                   <a:srgbClr val="8C7B5F"/>
                 </a:solidFill>
                 <a:latin typeface="Arial"/>
-                <a:ea typeface="Microsoft YaHei"/>
               </a:rPr>
               <a:t>лет</a:t>
             </a:r>
@@ -8868,7 +8796,6 @@
                   <a:srgbClr val="2A2A24"/>
                 </a:solidFill>
                 <a:latin typeface="Arial"/>
-                <a:ea typeface="Microsoft YaHei"/>
               </a:rPr>
               <a:t>стал следовать зову сердца, не нарушая Ритуала</a:t>
             </a:r>
@@ -8908,7 +8835,6 @@
                   <a:srgbClr val="8A8578"/>
                 </a:solidFill>
                 <a:latin typeface="Arial"/>
-                <a:ea typeface="Microsoft YaHei"/>
               </a:rPr>
               <a:t>«В 15 лет я обратил свои помыслы к учению…» — Конфуций о себе</a:t>
             </a:r>
@@ -8948,7 +8874,6 @@
                   <a:srgbClr val="8A8578"/>
                 </a:solidFill>
                 <a:latin typeface="Arial"/>
-                <a:ea typeface="Microsoft YaHei"/>
               </a:rPr>
               <a:t>КОНФУЦИАНСТВО</a:t>
             </a:r>
@@ -8988,7 +8913,6 @@
                   <a:srgbClr val="8A8578"/>
                 </a:solidFill>
                 <a:latin typeface="Arial"/>
-                <a:ea typeface="Microsoft YaHei"/>
               </a:rPr>
               <a:t>13</a:t>
             </a:r>
@@ -9070,7 +8994,6 @@
                   <a:srgbClr val="8A8578"/>
                 </a:solidFill>
                 <a:latin typeface="Arial"/>
-                <a:ea typeface="Microsoft YaHei"/>
               </a:rPr>
               <a:t>КОНФУЦИАНСТВО</a:t>
             </a:r>
@@ -9110,7 +9033,6 @@
                   <a:srgbClr val="2A2A24"/>
                 </a:solidFill>
                 <a:latin typeface="Arial"/>
-                <a:ea typeface="Microsoft YaHei"/>
               </a:rPr>
               <a:t>ОСНОВНЫЕ ПОНЯТИЯ</a:t>
             </a:r>
@@ -9127,7 +9049,6 @@
                   <a:srgbClr val="2A2A24"/>
                 </a:solidFill>
                 <a:latin typeface="Arial"/>
-                <a:ea typeface="Microsoft YaHei"/>
               </a:rPr>
               <a:t>И ПРИНЦИПЫ</a:t>
             </a:r>
@@ -9211,7 +9132,6 @@
                   <a:srgbClr val="2C382F"/>
                 </a:solidFill>
                 <a:latin typeface="Arial"/>
-                <a:ea typeface="Microsoft YaHei"/>
               </a:rPr>
               <a:t>Мораль, судьба и природа человека</a:t>
             </a:r>
@@ -9251,7 +9171,6 @@
                   <a:srgbClr val="8C7B5F"/>
                 </a:solidFill>
                 <a:latin typeface="Arial"/>
-                <a:ea typeface="Microsoft YaHei"/>
               </a:rPr>
               <a:t>—</a:t>
             </a:r>
@@ -9291,7 +9210,6 @@
                   <a:srgbClr val="2A2A24"/>
                 </a:solidFill>
                 <a:latin typeface="Arial"/>
-                <a:ea typeface="Microsoft YaHei"/>
               </a:rPr>
               <a:t>Главная тема — моральные принципы, на которых строятся отношения людей и управление государством</a:t>
             </a:r>
@@ -9331,7 +9249,6 @@
                   <a:srgbClr val="8C7B5F"/>
                 </a:solidFill>
                 <a:latin typeface="Arial"/>
-                <a:ea typeface="Microsoft YaHei"/>
               </a:rPr>
               <a:t>—</a:t>
             </a:r>
@@ -9371,7 +9288,6 @@
                   <a:srgbClr val="2A2A24"/>
                 </a:solidFill>
                 <a:latin typeface="Arial"/>
-                <a:ea typeface="Microsoft YaHei"/>
               </a:rPr>
               <a:t>Судьба: «Всё изначально предопределено, тут ничего не убавишь и не прибавишь»</a:t>
             </a:r>
@@ -9411,7 +9327,6 @@
                   <a:srgbClr val="8C7B5F"/>
                 </a:solidFill>
                 <a:latin typeface="Arial"/>
-                <a:ea typeface="Microsoft YaHei"/>
               </a:rPr>
               <a:t>—</a:t>
             </a:r>
@@ -9451,7 +9366,6 @@
                   <a:srgbClr val="2A2A24"/>
                 </a:solidFill>
                 <a:latin typeface="Arial"/>
-                <a:ea typeface="Microsoft YaHei"/>
               </a:rPr>
               <a:t>По природе люди похожи; незыблемы лишь высшая мудрость и крайняя глупость</a:t>
             </a:r>
@@ -9491,7 +9405,6 @@
                   <a:srgbClr val="8C7B5F"/>
                 </a:solidFill>
                 <a:latin typeface="Arial"/>
-                <a:ea typeface="Microsoft YaHei"/>
               </a:rPr>
               <a:t>—</a:t>
             </a:r>
@@ -9531,7 +9444,6 @@
                   <a:srgbClr val="2A2A24"/>
                 </a:solidFill>
                 <a:latin typeface="Arial"/>
-                <a:ea typeface="Microsoft YaHei"/>
               </a:rPr>
               <a:t>Различаются люди благодаря воспитанию и обретённым привычкам</a:t>
             </a:r>
@@ -9596,7 +9508,6 @@
                   <a:srgbClr val="8A8578"/>
                 </a:solidFill>
                 <a:latin typeface="Arial"/>
-                <a:ea typeface="Microsoft YaHei"/>
               </a:rPr>
               <a:t>КОНФУЦИАНСТВО</a:t>
             </a:r>
@@ -9636,7 +9547,6 @@
                   <a:srgbClr val="8A8578"/>
                 </a:solidFill>
                 <a:latin typeface="Arial"/>
-                <a:ea typeface="Microsoft YaHei"/>
               </a:rPr>
               <a:t>14</a:t>
             </a:r>
@@ -9718,7 +9628,6 @@
                   <a:srgbClr val="8A8578"/>
                 </a:solidFill>
                 <a:latin typeface="Arial"/>
-                <a:ea typeface="Microsoft YaHei"/>
               </a:rPr>
               <a:t>КОНФУЦИАНСТВО</a:t>
             </a:r>
@@ -9758,7 +9667,6 @@
                   <a:srgbClr val="2A2A24"/>
                 </a:solidFill>
                 <a:latin typeface="Arial"/>
-                <a:ea typeface="Microsoft YaHei"/>
               </a:rPr>
               <a:t>ГРАДАЦИЯ ЗНАНИЙ</a:t>
             </a:r>
@@ -9842,7 +9750,6 @@
                   <a:srgbClr val="8C7B5F"/>
                 </a:solidFill>
                 <a:latin typeface="Arial"/>
-                <a:ea typeface="Microsoft YaHei"/>
               </a:rPr>
               <a:t>I</a:t>
             </a:r>
@@ -9882,7 +9789,6 @@
                   <a:srgbClr val="2C382F"/>
                 </a:solidFill>
                 <a:latin typeface="Arial"/>
-                <a:ea typeface="Microsoft YaHei"/>
               </a:rPr>
               <a:t>ВЫСШЕЕ ЗНАНИЕ</a:t>
             </a:r>
@@ -9922,7 +9828,6 @@
                   <a:srgbClr val="2A2A24"/>
                 </a:solidFill>
                 <a:latin typeface="Arial"/>
-                <a:ea typeface="Microsoft YaHei"/>
               </a:rPr>
               <a:t>то, которое человек имеет при рождении</a:t>
             </a:r>
@@ -10006,7 +9911,6 @@
                   <a:srgbClr val="8C7B5F"/>
                 </a:solidFill>
                 <a:latin typeface="Arial"/>
-                <a:ea typeface="Microsoft YaHei"/>
               </a:rPr>
               <a:t>II</a:t>
             </a:r>
@@ -10046,7 +9950,6 @@
                   <a:srgbClr val="2C382F"/>
                 </a:solidFill>
                 <a:latin typeface="Arial"/>
-                <a:ea typeface="Microsoft YaHei"/>
               </a:rPr>
               <a:t>НИЖЕ</a:t>
             </a:r>
@@ -10086,7 +9989,6 @@
                   <a:srgbClr val="2A2A24"/>
                 </a:solidFill>
                 <a:latin typeface="Arial"/>
-                <a:ea typeface="Microsoft YaHei"/>
               </a:rPr>
               <a:t>знания, приобретаемые в процессе изучения</a:t>
             </a:r>
@@ -10170,7 +10072,6 @@
                   <a:srgbClr val="8C7B5F"/>
                 </a:solidFill>
                 <a:latin typeface="Arial"/>
-                <a:ea typeface="Microsoft YaHei"/>
               </a:rPr>
               <a:t>III</a:t>
             </a:r>
@@ -10210,7 +10111,6 @@
                   <a:srgbClr val="2C382F"/>
                 </a:solidFill>
                 <a:latin typeface="Arial"/>
-                <a:ea typeface="Microsoft YaHei"/>
               </a:rPr>
               <a:t>ЕЩЁ НИЖЕ</a:t>
             </a:r>
@@ -10250,7 +10150,6 @@
                   <a:srgbClr val="2A2A24"/>
                 </a:solidFill>
                 <a:latin typeface="Arial"/>
-                <a:ea typeface="Microsoft YaHei"/>
               </a:rPr>
               <a:t>знания, полученные в результате преодоления трудностей</a:t>
             </a:r>
@@ -10334,7 +10233,6 @@
                   <a:srgbClr val="8C7B5F"/>
                 </a:solidFill>
                 <a:latin typeface="Arial"/>
-                <a:ea typeface="Microsoft YaHei"/>
               </a:rPr>
               <a:t>IV</a:t>
             </a:r>
@@ -10374,7 +10272,6 @@
                   <a:srgbClr val="2C382F"/>
                 </a:solidFill>
                 <a:latin typeface="Arial"/>
-                <a:ea typeface="Microsoft YaHei"/>
               </a:rPr>
               <a:t>НИЧТОЖНЕЙШИЙ</a:t>
             </a:r>
@@ -10414,7 +10311,6 @@
                   <a:srgbClr val="2A2A24"/>
                 </a:solidFill>
                 <a:latin typeface="Arial"/>
-                <a:ea typeface="Microsoft YaHei"/>
               </a:rPr>
               <a:t>тот, кто не хочет извлечь урок из трудностей</a:t>
             </a:r>
@@ -10498,7 +10394,6 @@
                   <a:srgbClr val="8A8578"/>
                 </a:solidFill>
                 <a:latin typeface="Arial"/>
-                <a:ea typeface="Microsoft YaHei"/>
               </a:rPr>
               <a:t>КОНФУЦИАНСТВО</a:t>
             </a:r>
@@ -10538,7 +10433,6 @@
                   <a:srgbClr val="8A8578"/>
                 </a:solidFill>
                 <a:latin typeface="Arial"/>
-                <a:ea typeface="Microsoft YaHei"/>
               </a:rPr>
               <a:t>15</a:t>
             </a:r>
@@ -10620,7 +10514,6 @@
                   <a:srgbClr val="8A8578"/>
                 </a:solidFill>
                 <a:latin typeface="Arial"/>
-                <a:ea typeface="Microsoft YaHei"/>
               </a:rPr>
               <a:t>КОНФУЦИАНСТВО · ЦИТАТА</a:t>
             </a:r>
@@ -10660,7 +10553,6 @@
                   <a:srgbClr val="2A2A24"/>
                 </a:solidFill>
                 <a:latin typeface="Arial"/>
-                <a:ea typeface="Microsoft YaHei"/>
               </a:rPr>
               <a:t>«Три пути ведут к знанию:</a:t>
             </a:r>
@@ -10677,7 +10569,6 @@
                   <a:srgbClr val="2A2A24"/>
                 </a:solidFill>
                 <a:latin typeface="Arial"/>
-                <a:ea typeface="Microsoft YaHei"/>
               </a:rPr>
               <a:t>путь размышления — самый благородный,</a:t>
             </a:r>
@@ -10694,7 +10585,6 @@
                   <a:srgbClr val="2A2A24"/>
                 </a:solidFill>
                 <a:latin typeface="Arial"/>
-                <a:ea typeface="Microsoft YaHei"/>
               </a:rPr>
               <a:t>путь подражания — самый лёгкий,</a:t>
             </a:r>
@@ -10711,7 +10601,6 @@
                   <a:srgbClr val="2A2A24"/>
                 </a:solidFill>
                 <a:latin typeface="Arial"/>
-                <a:ea typeface="Microsoft YaHei"/>
               </a:rPr>
               <a:t>путь опыта — самый горький.»</a:t>
             </a:r>
@@ -10795,7 +10684,6 @@
                   <a:srgbClr val="2C382F"/>
                 </a:solidFill>
                 <a:latin typeface="Arial"/>
-                <a:ea typeface="Microsoft YaHei"/>
               </a:rPr>
               <a:t>КУН ЦЮ</a:t>
             </a:r>
@@ -10835,7 +10723,6 @@
                   <a:srgbClr val="8A8578"/>
                 </a:solidFill>
                 <a:latin typeface="Arial"/>
-                <a:ea typeface="Microsoft YaHei"/>
               </a:rPr>
               <a:t>КОНФУЦИАНСТВО · ЦИТАТА</a:t>
             </a:r>
@@ -10875,7 +10762,6 @@
                   <a:srgbClr val="8A8578"/>
                 </a:solidFill>
                 <a:latin typeface="Arial"/>
-                <a:ea typeface="Microsoft YaHei"/>
               </a:rPr>
               <a:t>16</a:t>
             </a:r>
@@ -10957,7 +10843,6 @@
                   <a:srgbClr val="8A8578"/>
                 </a:solidFill>
                 <a:latin typeface="Arial"/>
-                <a:ea typeface="Microsoft YaHei"/>
               </a:rPr>
               <a:t>ФУНДАМЕНТ УЧЕНИЯ</a:t>
             </a:r>
@@ -10997,7 +10882,6 @@
                   <a:srgbClr val="2A2A24"/>
                 </a:solidFill>
                 <a:latin typeface="Arial"/>
-                <a:ea typeface="Microsoft YaHei"/>
               </a:rPr>
               <a:t>БЛАГОРОДНЫЙ МУЖ</a:t>
             </a:r>
@@ -11081,7 +10965,6 @@
                   <a:srgbClr val="2C382F"/>
                 </a:solidFill>
                 <a:latin typeface="Arial"/>
-                <a:ea typeface="Microsoft YaHei"/>
               </a:rPr>
               <a:t>ЦЗЮНЬ-ЦЗЫ — эталон человека, идущего по правильному пути</a:t>
             </a:r>
@@ -11121,7 +11004,6 @@
                   <a:srgbClr val="C2BBAC"/>
                 </a:solidFill>
                 <a:latin typeface="Arial"/>
-                <a:ea typeface="Microsoft YaHei"/>
               </a:rPr>
               <a:t>仁</a:t>
             </a:r>
@@ -11161,7 +11043,6 @@
                   <a:srgbClr val="2C382F"/>
                 </a:solidFill>
                 <a:latin typeface="Arial"/>
-                <a:ea typeface="Microsoft YaHei"/>
               </a:rPr>
               <a:t>ЖЭНЬ</a:t>
             </a:r>
@@ -11201,7 +11082,6 @@
                   <a:srgbClr val="8A8578"/>
                 </a:solidFill>
                 <a:latin typeface="Arial"/>
-                <a:ea typeface="Microsoft YaHei"/>
               </a:rPr>
               <a:t>Гуманность, человеколюбие</a:t>
             </a:r>
@@ -11241,7 +11121,6 @@
                   <a:srgbClr val="2A2A24"/>
                 </a:solidFill>
                 <a:latin typeface="Arial"/>
-                <a:ea typeface="Microsoft YaHei"/>
               </a:rPr>
               <a:t>Не делай другим того, чего не желал бы себе</a:t>
             </a:r>
@@ -11325,7 +11204,6 @@
                   <a:srgbClr val="C2BBAC"/>
                 </a:solidFill>
                 <a:latin typeface="Arial"/>
-                <a:ea typeface="Microsoft YaHei"/>
               </a:rPr>
               <a:t>礼</a:t>
             </a:r>
@@ -11365,7 +11243,6 @@
                   <a:srgbClr val="2C382F"/>
                 </a:solidFill>
                 <a:latin typeface="Arial"/>
-                <a:ea typeface="Microsoft YaHei"/>
               </a:rPr>
               <a:t>ЛИ</a:t>
             </a:r>
@@ -11405,7 +11282,6 @@
                   <a:srgbClr val="8A8578"/>
                 </a:solidFill>
                 <a:latin typeface="Arial"/>
-                <a:ea typeface="Microsoft YaHei"/>
               </a:rPr>
               <a:t>Почтительность, ритуал</a:t>
             </a:r>
@@ -11445,7 +11321,6 @@
                   <a:srgbClr val="2A2A24"/>
                 </a:solidFill>
                 <a:latin typeface="Arial"/>
-                <a:ea typeface="Microsoft YaHei"/>
               </a:rPr>
               <a:t>Правила, регламентирующие жизнь от семьи до государства</a:t>
             </a:r>
@@ -11529,7 +11404,6 @@
                   <a:srgbClr val="C2BBAC"/>
                 </a:solidFill>
                 <a:latin typeface="Arial"/>
-                <a:ea typeface="Microsoft YaHei"/>
               </a:rPr>
               <a:t>义</a:t>
             </a:r>
@@ -11569,7 +11443,6 @@
                   <a:srgbClr val="2C382F"/>
                 </a:solidFill>
                 <a:latin typeface="Arial"/>
-                <a:ea typeface="Microsoft YaHei"/>
               </a:rPr>
               <a:t>И</a:t>
             </a:r>
@@ -11609,7 +11482,6 @@
                   <a:srgbClr val="8A8578"/>
                 </a:solidFill>
                 <a:latin typeface="Arial"/>
-                <a:ea typeface="Microsoft YaHei"/>
               </a:rPr>
               <a:t>Долг-справедливость</a:t>
             </a:r>
@@ -11649,7 +11521,6 @@
                   <a:srgbClr val="2A2A24"/>
                 </a:solidFill>
                 <a:latin typeface="Arial"/>
-                <a:ea typeface="Microsoft YaHei"/>
               </a:rPr>
               <a:t>Моральные принципы по собственной воле, а не из страха</a:t>
             </a:r>
@@ -11733,7 +11604,6 @@
                   <a:srgbClr val="C2BBAC"/>
                 </a:solidFill>
                 <a:latin typeface="Arial"/>
-                <a:ea typeface="Microsoft YaHei"/>
               </a:rPr>
               <a:t>智</a:t>
             </a:r>
@@ -11773,7 +11643,6 @@
                   <a:srgbClr val="2C382F"/>
                 </a:solidFill>
                 <a:latin typeface="Arial"/>
-                <a:ea typeface="Microsoft YaHei"/>
               </a:rPr>
               <a:t>ЧЖИ</a:t>
             </a:r>
@@ -11813,7 +11682,6 @@
                   <a:srgbClr val="8A8578"/>
                 </a:solidFill>
                 <a:latin typeface="Arial"/>
-                <a:ea typeface="Microsoft YaHei"/>
               </a:rPr>
               <a:t>Здравый смысл, мудрость</a:t>
             </a:r>
@@ -11853,7 +11721,6 @@
                   <a:srgbClr val="2A2A24"/>
                 </a:solidFill>
                 <a:latin typeface="Arial"/>
-                <a:ea typeface="Microsoft YaHei"/>
               </a:rPr>
               <a:t>Умение просчитать следствия своих действий</a:t>
             </a:r>
@@ -11937,7 +11804,6 @@
                   <a:srgbClr val="C2BBAC"/>
                 </a:solidFill>
                 <a:latin typeface="Arial"/>
-                <a:ea typeface="Microsoft YaHei"/>
               </a:rPr>
               <a:t>信</a:t>
             </a:r>
@@ -11977,7 +11843,6 @@
                   <a:srgbClr val="2C382F"/>
                 </a:solidFill>
                 <a:latin typeface="Arial"/>
-                <a:ea typeface="Microsoft YaHei"/>
               </a:rPr>
               <a:t>СИНЬ</a:t>
             </a:r>
@@ -12017,7 +11882,6 @@
                   <a:srgbClr val="8A8578"/>
                 </a:solidFill>
                 <a:latin typeface="Arial"/>
-                <a:ea typeface="Microsoft YaHei"/>
               </a:rPr>
               <a:t>Искренность, добросовестность</a:t>
             </a:r>
@@ -12057,7 +11921,6 @@
                   <a:srgbClr val="2A2A24"/>
                 </a:solidFill>
                 <a:latin typeface="Arial"/>
-                <a:ea typeface="Microsoft YaHei"/>
               </a:rPr>
               <a:t>Уравновешивает Ли, предупреждая лицемерие</a:t>
             </a:r>
@@ -12141,7 +12004,6 @@
                   <a:srgbClr val="8A8578"/>
                 </a:solidFill>
                 <a:latin typeface="Arial"/>
-                <a:ea typeface="Microsoft YaHei"/>
               </a:rPr>
               <a:t>ФУНДАМЕНТ УЧЕНИЯ</a:t>
             </a:r>
@@ -12181,7 +12043,6 @@
                   <a:srgbClr val="8A8578"/>
                 </a:solidFill>
                 <a:latin typeface="Arial"/>
-                <a:ea typeface="Microsoft YaHei"/>
               </a:rPr>
               <a:t>17</a:t>
             </a:r>
@@ -12263,7 +12124,6 @@
                   <a:srgbClr val="8A8578"/>
                 </a:solidFill>
                 <a:latin typeface="Arial"/>
-                <a:ea typeface="Microsoft YaHei"/>
               </a:rPr>
               <a:t>КОНФУЦИАНСТВО</a:t>
             </a:r>
@@ -12303,7 +12163,6 @@
                   <a:srgbClr val="2A2A24"/>
                 </a:solidFill>
                 <a:latin typeface="Arial"/>
-                <a:ea typeface="Microsoft YaHei"/>
               </a:rPr>
               <a:t>КОНЦЕПЦИЯ О ГОСУДАРСТВЕ</a:t>
             </a:r>
@@ -12387,7 +12246,6 @@
                   <a:srgbClr val="2C382F"/>
                 </a:solidFill>
                 <a:latin typeface="Arial"/>
-                <a:ea typeface="Microsoft YaHei"/>
               </a:rPr>
               <a:t>Правильный человек → правильное общество → правильное государство</a:t>
             </a:r>
@@ -12427,7 +12285,6 @@
                   <a:srgbClr val="8C7B5F"/>
                 </a:solidFill>
                 <a:latin typeface="Arial"/>
-                <a:ea typeface="Microsoft YaHei"/>
               </a:rPr>
               <a:t>—</a:t>
             </a:r>
@@ -12467,7 +12324,6 @@
                   <a:srgbClr val="2A2A24"/>
                 </a:solidFill>
                 <a:latin typeface="Arial"/>
-                <a:ea typeface="Microsoft YaHei"/>
               </a:rPr>
               <a:t>Человек должен жить в обществе гуманности и милосердия</a:t>
             </a:r>
@@ -12507,7 +12363,6 @@
                   <a:srgbClr val="8C7B5F"/>
                 </a:solidFill>
                 <a:latin typeface="Arial"/>
-                <a:ea typeface="Microsoft YaHei"/>
               </a:rPr>
               <a:t>—</a:t>
             </a:r>
@@ -12547,7 +12402,6 @@
                   <a:srgbClr val="2A2A24"/>
                 </a:solidFill>
                 <a:latin typeface="Arial"/>
-                <a:ea typeface="Microsoft YaHei"/>
               </a:rPr>
               <a:t>Правитель и чиновники управляют по принципам справедливости, честности и любви</a:t>
             </a:r>
@@ -12587,7 +12441,6 @@
                   <a:srgbClr val="8C7B5F"/>
                 </a:solidFill>
                 <a:latin typeface="Arial"/>
-                <a:ea typeface="Microsoft YaHei"/>
               </a:rPr>
               <a:t>—</a:t>
             </a:r>
@@ -12627,7 +12480,6 @@
                   <a:srgbClr val="2A2A24"/>
                 </a:solidFill>
                 <a:latin typeface="Arial"/>
-                <a:ea typeface="Microsoft YaHei"/>
               </a:rPr>
               <a:t>«Не делай другим того, чего не желаешь себе» — принцип политический, а не только личный</a:t>
             </a:r>
@@ -12692,7 +12544,6 @@
                   <a:srgbClr val="8A8578"/>
                 </a:solidFill>
                 <a:latin typeface="Arial"/>
-                <a:ea typeface="Microsoft YaHei"/>
               </a:rPr>
               <a:t>Конфуций с учениками</a:t>
             </a:r>
@@ -12820,7 +12671,6 @@
                   <a:srgbClr val="2C382F"/>
                 </a:solidFill>
                 <a:latin typeface="Arial"/>
-                <a:ea typeface="Microsoft YaHei"/>
               </a:rPr>
               <a:t>«Суть господина подобна ветру, а суть простых людей подобна траве. И когда ветер веет над травой, она не может выбирать, а наклоняется»</a:t>
             </a:r>
@@ -12860,7 +12710,6 @@
                   <a:srgbClr val="8A8578"/>
                 </a:solidFill>
                 <a:latin typeface="Arial"/>
-                <a:ea typeface="Microsoft YaHei"/>
               </a:rPr>
               <a:t>КОНФУЦИАНСТВО</a:t>
             </a:r>
@@ -12900,7 +12749,6 @@
                   <a:srgbClr val="8A8578"/>
                 </a:solidFill>
                 <a:latin typeface="Arial"/>
-                <a:ea typeface="Microsoft YaHei"/>
               </a:rPr>
               <a:t>18</a:t>
             </a:r>
@@ -12982,7 +12830,6 @@
                   <a:srgbClr val="8A8578"/>
                 </a:solidFill>
                 <a:latin typeface="Arial"/>
-                <a:ea typeface="Microsoft YaHei"/>
               </a:rPr>
               <a:t>КОНФУЦИЙ</a:t>
             </a:r>
@@ -13022,7 +12869,6 @@
                   <a:srgbClr val="2A2A24"/>
                 </a:solidFill>
                 <a:latin typeface="Arial"/>
-                <a:ea typeface="Microsoft YaHei"/>
               </a:rPr>
               <a:t>КАК СТАТЬ УСПЕШНЫМ</a:t>
             </a:r>
@@ -13106,7 +12952,6 @@
                   <a:srgbClr val="2C382F"/>
                 </a:solidFill>
                 <a:latin typeface="Arial"/>
-                <a:ea typeface="Microsoft YaHei"/>
               </a:rPr>
               <a:t>Советы, которые актуальны и сегодня</a:t>
             </a:r>
@@ -13146,7 +12991,6 @@
                   <a:srgbClr val="8C7B5F"/>
                 </a:solidFill>
                 <a:latin typeface="Arial"/>
-                <a:ea typeface="Microsoft YaHei"/>
               </a:rPr>
               <a:t>01</a:t>
             </a:r>
@@ -13186,7 +13030,6 @@
                   <a:srgbClr val="2A2A24"/>
                 </a:solidFill>
                 <a:latin typeface="Arial"/>
-                <a:ea typeface="Microsoft YaHei"/>
               </a:rPr>
               <a:t>Идите к цели, пусть даже медленно, не останавливаясь</a:t>
             </a:r>
@@ -13270,7 +13113,6 @@
                   <a:srgbClr val="8C7B5F"/>
                 </a:solidFill>
                 <a:latin typeface="Arial"/>
-                <a:ea typeface="Microsoft YaHei"/>
               </a:rPr>
               <a:t>02</a:t>
             </a:r>
@@ -13310,7 +13152,6 @@
                   <a:srgbClr val="2A2A24"/>
                 </a:solidFill>
                 <a:latin typeface="Arial"/>
-                <a:ea typeface="Microsoft YaHei"/>
               </a:rPr>
               <a:t>Держите инструмент остро отточенным: удача зависит от подготовки</a:t>
             </a:r>
@@ -13394,7 +13235,6 @@
                   <a:srgbClr val="8C7B5F"/>
                 </a:solidFill>
                 <a:latin typeface="Arial"/>
-                <a:ea typeface="Microsoft YaHei"/>
               </a:rPr>
               <a:t>03</a:t>
             </a:r>
@@ -13434,7 +13274,6 @@
                   <a:srgbClr val="2A2A24"/>
                 </a:solidFill>
                 <a:latin typeface="Arial"/>
-                <a:ea typeface="Microsoft YaHei"/>
               </a:rPr>
               <a:t>Не меняйте поставленную цель — важны лишь методы её достижения</a:t>
             </a:r>
@@ -13518,7 +13357,6 @@
                   <a:srgbClr val="8C7B5F"/>
                 </a:solidFill>
                 <a:latin typeface="Arial"/>
-                <a:ea typeface="Microsoft YaHei"/>
               </a:rPr>
               <a:t>04</a:t>
             </a:r>
@@ -13558,7 +13396,6 @@
                   <a:srgbClr val="2A2A24"/>
                 </a:solidFill>
                 <a:latin typeface="Arial"/>
-                <a:ea typeface="Microsoft YaHei"/>
               </a:rPr>
               <a:t>Делайте только по-настоящему важное дело, прикладывая максимум усилий</a:t>
             </a:r>
@@ -13642,7 +13479,6 @@
                   <a:srgbClr val="8C7B5F"/>
                 </a:solidFill>
                 <a:latin typeface="Arial"/>
-                <a:ea typeface="Microsoft YaHei"/>
               </a:rPr>
               <a:t>05</a:t>
             </a:r>
@@ -13682,7 +13518,6 @@
                   <a:srgbClr val="2A2A24"/>
                 </a:solidFill>
                 <a:latin typeface="Arial"/>
-                <a:ea typeface="Microsoft YaHei"/>
               </a:rPr>
               <a:t>Общайтесь с теми, кто развивается: он поведёт вас за собой</a:t>
             </a:r>
@@ -13766,7 +13601,6 @@
                   <a:srgbClr val="8C7B5F"/>
                 </a:solidFill>
                 <a:latin typeface="Arial"/>
-                <a:ea typeface="Microsoft YaHei"/>
               </a:rPr>
               <a:t>06</a:t>
             </a:r>
@@ -13806,7 +13640,6 @@
                   <a:srgbClr val="2A2A24"/>
                 </a:solidFill>
                 <a:latin typeface="Arial"/>
-                <a:ea typeface="Microsoft YaHei"/>
               </a:rPr>
               <a:t>Работайте над собой: мир вокруг — зеркало вашего внутреннего «я»</a:t>
             </a:r>
@@ -13890,7 +13723,6 @@
                   <a:srgbClr val="8C7B5F"/>
                 </a:solidFill>
                 <a:latin typeface="Arial"/>
-                <a:ea typeface="Microsoft YaHei"/>
               </a:rPr>
               <a:t>07</a:t>
             </a:r>
@@ -13930,7 +13762,6 @@
                   <a:srgbClr val="2A2A24"/>
                 </a:solidFill>
                 <a:latin typeface="Arial"/>
-                <a:ea typeface="Microsoft YaHei"/>
               </a:rPr>
               <a:t>Не позволяйте обидам сбить вас с пути</a:t>
             </a:r>
@@ -14014,7 +13845,6 @@
                   <a:srgbClr val="8C7B5F"/>
                 </a:solidFill>
                 <a:latin typeface="Arial"/>
-                <a:ea typeface="Microsoft YaHei"/>
               </a:rPr>
               <a:t>08</a:t>
             </a:r>
@@ -14054,7 +13884,6 @@
                   <a:srgbClr val="2A2A24"/>
                 </a:solidFill>
                 <a:latin typeface="Arial"/>
-                <a:ea typeface="Microsoft YaHei"/>
               </a:rPr>
               <a:t>Контролируйте гнев: за всё придётся платить</a:t>
             </a:r>
@@ -14138,7 +13967,6 @@
                   <a:srgbClr val="8C7B5F"/>
                 </a:solidFill>
                 <a:latin typeface="Arial"/>
-                <a:ea typeface="Microsoft YaHei"/>
               </a:rPr>
               <a:t>09</a:t>
             </a:r>
@@ -14178,7 +14006,6 @@
                   <a:srgbClr val="2A2A24"/>
                 </a:solidFill>
                 <a:latin typeface="Arial"/>
-                <a:ea typeface="Microsoft YaHei"/>
               </a:rPr>
               <a:t>Наблюдайте за людьми: каждый может научить или предостеречь</a:t>
             </a:r>
@@ -14262,7 +14089,6 @@
                   <a:srgbClr val="8A8578"/>
                 </a:solidFill>
                 <a:latin typeface="Arial"/>
-                <a:ea typeface="Microsoft YaHei"/>
               </a:rPr>
               <a:t>КОНФУЦИЙ</a:t>
             </a:r>
@@ -14302,7 +14128,6 @@
                   <a:srgbClr val="8A8578"/>
                 </a:solidFill>
                 <a:latin typeface="Arial"/>
-                <a:ea typeface="Microsoft YaHei"/>
               </a:rPr>
               <a:t>19</a:t>
             </a:r>
@@ -14408,7 +14233,6 @@
                   <a:srgbClr val="EDE9E1"/>
                 </a:solidFill>
                 <a:latin typeface="Arial"/>
-                <a:ea typeface="Microsoft YaHei"/>
               </a:rPr>
               <a:t>目錄</a:t>
             </a:r>
@@ -14448,7 +14272,6 @@
                   <a:srgbClr val="C2CBBF"/>
                 </a:solidFill>
                 <a:latin typeface="Arial"/>
-                <a:ea typeface="Microsoft YaHei"/>
               </a:rPr>
               <a:t>СОДЕРЖАНИЕ</a:t>
             </a:r>
@@ -14532,7 +14355,6 @@
                   <a:srgbClr val="8C7B5F"/>
                 </a:solidFill>
                 <a:latin typeface="Arial"/>
-                <a:ea typeface="Microsoft YaHei"/>
               </a:rPr>
               <a:t>01</a:t>
             </a:r>
@@ -14572,7 +14394,6 @@
                   <a:srgbClr val="2A2A24"/>
                 </a:solidFill>
                 <a:latin typeface="Arial"/>
-                <a:ea typeface="Microsoft YaHei"/>
               </a:rPr>
               <a:t>Два учителя</a:t>
             </a:r>
@@ -14612,7 +14433,6 @@
                   <a:srgbClr val="8A8578"/>
                 </a:solidFill>
                 <a:latin typeface="Arial"/>
-                <a:ea typeface="Microsoft YaHei"/>
               </a:rPr>
               <a:t>Лао-цзы и Конфуций</a:t>
             </a:r>
@@ -14696,7 +14516,6 @@
                   <a:srgbClr val="8C7B5F"/>
                 </a:solidFill>
                 <a:latin typeface="Arial"/>
-                <a:ea typeface="Microsoft YaHei"/>
               </a:rPr>
               <a:t>02</a:t>
             </a:r>
@@ -14736,7 +14555,6 @@
                   <a:srgbClr val="2A2A24"/>
                 </a:solidFill>
                 <a:latin typeface="Arial"/>
-                <a:ea typeface="Microsoft YaHei"/>
               </a:rPr>
               <a:t>Сравнительный анализ</a:t>
             </a:r>
@@ -14776,7 +14594,6 @@
                   <a:srgbClr val="8A8578"/>
                 </a:solidFill>
                 <a:latin typeface="Arial"/>
-                <a:ea typeface="Microsoft YaHei"/>
               </a:rPr>
               <a:t>Два ответа на один вопрос</a:t>
             </a:r>
@@ -14860,7 +14677,6 @@
                   <a:srgbClr val="8C7B5F"/>
                 </a:solidFill>
                 <a:latin typeface="Arial"/>
-                <a:ea typeface="Microsoft YaHei"/>
               </a:rPr>
               <a:t>03</a:t>
             </a:r>
@@ -14900,7 +14716,6 @@
                   <a:srgbClr val="2A2A24"/>
                 </a:solidFill>
                 <a:latin typeface="Arial"/>
-                <a:ea typeface="Microsoft YaHei"/>
               </a:rPr>
               <a:t>Даосизм</a:t>
             </a:r>
@@ -14940,7 +14755,6 @@
                   <a:srgbClr val="8A8578"/>
                 </a:solidFill>
                 <a:latin typeface="Arial"/>
-                <a:ea typeface="Microsoft YaHei"/>
               </a:rPr>
               <a:t>Биография, Дао и Дэ, недеяние</a:t>
             </a:r>
@@ -15024,7 +14838,6 @@
                   <a:srgbClr val="8C7B5F"/>
                 </a:solidFill>
                 <a:latin typeface="Arial"/>
-                <a:ea typeface="Microsoft YaHei"/>
               </a:rPr>
               <a:t>04</a:t>
             </a:r>
@@ -15064,7 +14877,6 @@
                   <a:srgbClr val="2A2A24"/>
                 </a:solidFill>
                 <a:latin typeface="Arial"/>
-                <a:ea typeface="Microsoft YaHei"/>
               </a:rPr>
               <a:t>Новое время</a:t>
             </a:r>
@@ -15104,7 +14916,6 @@
                   <a:srgbClr val="8A8578"/>
                 </a:solidFill>
                 <a:latin typeface="Arial"/>
-                <a:ea typeface="Microsoft YaHei"/>
               </a:rPr>
               <a:t>С 1000 года н. э.</a:t>
             </a:r>
@@ -15188,7 +14999,6 @@
                   <a:srgbClr val="8C7B5F"/>
                 </a:solidFill>
                 <a:latin typeface="Arial"/>
-                <a:ea typeface="Microsoft YaHei"/>
               </a:rPr>
               <a:t>05</a:t>
             </a:r>
@@ -15228,7 +15038,6 @@
                   <a:srgbClr val="2A2A24"/>
                 </a:solidFill>
                 <a:latin typeface="Arial"/>
-                <a:ea typeface="Microsoft YaHei"/>
               </a:rPr>
               <a:t>Конфуцианство</a:t>
             </a:r>
@@ -15268,7 +15077,6 @@
                   <a:srgbClr val="8A8578"/>
                 </a:solidFill>
                 <a:latin typeface="Arial"/>
-                <a:ea typeface="Microsoft YaHei"/>
               </a:rPr>
               <a:t>Биография, знание, цзюнь-цзы</a:t>
             </a:r>
@@ -15352,7 +15160,6 @@
                   <a:srgbClr val="8C7B5F"/>
                 </a:solidFill>
                 <a:latin typeface="Arial"/>
-                <a:ea typeface="Microsoft YaHei"/>
               </a:rPr>
               <a:t>06</a:t>
             </a:r>
@@ -15392,7 +15199,6 @@
                   <a:srgbClr val="2A2A24"/>
                 </a:solidFill>
                 <a:latin typeface="Arial"/>
-                <a:ea typeface="Microsoft YaHei"/>
               </a:rPr>
               <a:t>Государство и успех</a:t>
             </a:r>
@@ -15432,7 +15238,6 @@
                   <a:srgbClr val="8A8578"/>
                 </a:solidFill>
                 <a:latin typeface="Arial"/>
-                <a:ea typeface="Microsoft YaHei"/>
               </a:rPr>
               <a:t>Мораль как политика</a:t>
             </a:r>
@@ -15516,7 +15321,6 @@
                   <a:srgbClr val="8C7B5F"/>
                 </a:solidFill>
                 <a:latin typeface="Arial"/>
-                <a:ea typeface="Microsoft YaHei"/>
               </a:rPr>
               <a:t>07</a:t>
             </a:r>
@@ -15556,7 +15360,6 @@
                   <a:srgbClr val="2A2A24"/>
                 </a:solidFill>
                 <a:latin typeface="Arial"/>
-                <a:ea typeface="Microsoft YaHei"/>
               </a:rPr>
               <a:t>Итог</a:t>
             </a:r>
@@ -15596,7 +15399,6 @@
                   <a:srgbClr val="8A8578"/>
                 </a:solidFill>
                 <a:latin typeface="Arial"/>
-                <a:ea typeface="Microsoft YaHei"/>
               </a:rPr>
               <a:t>Две стороны одной мудрости</a:t>
             </a:r>
@@ -15636,7 +15438,6 @@
                   <a:srgbClr val="8A8578"/>
                 </a:solidFill>
                 <a:latin typeface="Arial"/>
-                <a:ea typeface="Microsoft YaHei"/>
               </a:rPr>
               <a:t>СОДЕРЖАНИЕ</a:t>
             </a:r>
@@ -15676,7 +15477,6 @@
                   <a:srgbClr val="8A8578"/>
                 </a:solidFill>
                 <a:latin typeface="Arial"/>
-                <a:ea typeface="Microsoft YaHei"/>
               </a:rPr>
               <a:t>02</a:t>
             </a:r>
@@ -15758,7 +15558,6 @@
                   <a:srgbClr val="8A8578"/>
                 </a:solidFill>
                 <a:latin typeface="Arial"/>
-                <a:ea typeface="Microsoft YaHei"/>
               </a:rPr>
               <a:t>ЗАКЛЮЧЕНИЕ</a:t>
             </a:r>
@@ -15798,7 +15597,6 @@
                   <a:srgbClr val="2A2A24"/>
                 </a:solidFill>
                 <a:latin typeface="Arial"/>
-                <a:ea typeface="Microsoft YaHei"/>
               </a:rPr>
               <a:t>КАКОЙ ИТОГ?</a:t>
             </a:r>
@@ -15882,7 +15680,6 @@
                   <a:srgbClr val="C2BBAC"/>
                 </a:solidFill>
                 <a:latin typeface="Arial"/>
-                <a:ea typeface="Microsoft YaHei"/>
               </a:rPr>
               <a:t>1</a:t>
             </a:r>
@@ -15922,7 +15719,6 @@
                   <a:srgbClr val="2A2A24"/>
                 </a:solidFill>
                 <a:latin typeface="Arial"/>
-                <a:ea typeface="Microsoft YaHei"/>
               </a:rPr>
               <a:t>Даосизм и конфуцианство — два разных ответа на вопрос, как «достичь берега»</a:t>
             </a:r>
@@ -15962,7 +15758,6 @@
                   <a:srgbClr val="C2BBAC"/>
                 </a:solidFill>
                 <a:latin typeface="Arial"/>
-                <a:ea typeface="Microsoft YaHei"/>
               </a:rPr>
               <a:t>2</a:t>
             </a:r>
@@ -16002,7 +15797,6 @@
                   <a:srgbClr val="2A2A24"/>
                 </a:solidFill>
                 <a:latin typeface="Arial"/>
-                <a:ea typeface="Microsoft YaHei"/>
               </a:rPr>
               <a:t>Лао-цзы предлагает довериться естественному течению вещей — путь недеяния</a:t>
             </a:r>
@@ -16042,7 +15836,6 @@
                   <a:srgbClr val="C2BBAC"/>
                 </a:solidFill>
                 <a:latin typeface="Arial"/>
-                <a:ea typeface="Microsoft YaHei"/>
               </a:rPr>
               <a:t>3</a:t>
             </a:r>
@@ -16082,7 +15875,6 @@
                   <a:srgbClr val="2A2A24"/>
                 </a:solidFill>
                 <a:latin typeface="Arial"/>
-                <a:ea typeface="Microsoft YaHei"/>
               </a:rPr>
               <a:t>Конфуций предлагает выстраивать себя и общество через воспитание, ритуал и долг</a:t>
             </a:r>
@@ -16122,7 +15914,6 @@
                   <a:srgbClr val="C2BBAC"/>
                 </a:solidFill>
                 <a:latin typeface="Arial"/>
-                <a:ea typeface="Microsoft YaHei"/>
               </a:rPr>
               <a:t>4</a:t>
             </a:r>
@@ -16162,7 +15953,6 @@
                   <a:srgbClr val="2A2A24"/>
                 </a:solidFill>
                 <a:latin typeface="Arial"/>
-                <a:ea typeface="Microsoft YaHei"/>
               </a:rPr>
               <a:t>Оба ищут не крайность, а верную меру — тот самый путь «поперёк течения»</a:t>
             </a:r>
@@ -16290,7 +16080,6 @@
                   <a:srgbClr val="2C382F"/>
                 </a:solidFill>
                 <a:latin typeface="Arial"/>
-                <a:ea typeface="Microsoft YaHei"/>
               </a:rPr>
               <a:t>Почти три тысячи лет они сосуществуют в китайской культуре не как враги, а как две стороны одной мудрости</a:t>
             </a:r>
@@ -16330,7 +16119,6 @@
                   <a:srgbClr val="8A8578"/>
                 </a:solidFill>
                 <a:latin typeface="Arial"/>
-                <a:ea typeface="Microsoft YaHei"/>
               </a:rPr>
               <a:t>ЗАКЛЮЧЕНИЕ</a:t>
             </a:r>
@@ -16370,7 +16158,6 @@
                   <a:srgbClr val="8A8578"/>
                 </a:solidFill>
                 <a:latin typeface="Arial"/>
-                <a:ea typeface="Microsoft YaHei"/>
               </a:rPr>
               <a:t>20</a:t>
             </a:r>
@@ -16434,9 +16221,7 @@
             <a:avLst/>
           </a:prstGeom>
           <a:solidFill>
-            <a:srgbClr val="EDE9E1">
-              <a:alpha val="92000"/>
-            </a:srgbClr>
+            <a:srgbClr val="EDE9E1"/>
           </a:solidFill>
           <a:ln>
             <a:noFill/>
@@ -16586,7 +16371,6 @@
                   <a:srgbClr val="2A2A24"/>
                 </a:solidFill>
                 <a:latin typeface="Arial"/>
-                <a:ea typeface="Microsoft YaHei"/>
               </a:rPr>
               <a:t>СПАСИБО</a:t>
             </a:r>
@@ -16603,7 +16387,6 @@
                   <a:srgbClr val="2A2A24"/>
                 </a:solidFill>
                 <a:latin typeface="Arial"/>
-                <a:ea typeface="Microsoft YaHei"/>
               </a:rPr>
               <a:t>ЗА ВНИМАНИЕ</a:t>
             </a:r>
@@ -16687,7 +16470,6 @@
                   <a:srgbClr val="4A4942"/>
                 </a:solidFill>
                 <a:latin typeface="Arial"/>
-                <a:ea typeface="Microsoft YaHei"/>
               </a:rPr>
               <a:t>«Не иди по течению, не иди против течения — иди поперёк него, если хочешь достичь берега.»</a:t>
             </a:r>
@@ -16707,7 +16489,6 @@
                   <a:srgbClr val="8A8578"/>
                 </a:solidFill>
                 <a:latin typeface="Arial"/>
-                <a:ea typeface="Microsoft YaHei"/>
               </a:rPr>
               <a:t>СЛОВА ВАНТАЛЫ</a:t>
             </a:r>
@@ -16789,7 +16570,6 @@
                   <a:srgbClr val="8A8578"/>
                 </a:solidFill>
                 <a:latin typeface="Arial"/>
-                <a:ea typeface="Microsoft YaHei"/>
               </a:rPr>
               <a:t>ДЕЙСТВУЮЩИЕ ЛИЦА</a:t>
             </a:r>
@@ -16829,7 +16609,6 @@
                   <a:srgbClr val="2A2A24"/>
                 </a:solidFill>
                 <a:latin typeface="Arial"/>
-                <a:ea typeface="Microsoft YaHei"/>
               </a:rPr>
               <a:t>ДВА УЧИТЕЛЯ</a:t>
             </a:r>
@@ -16981,7 +16760,6 @@
                   <a:srgbClr val="2A2A24"/>
                 </a:solidFill>
                 <a:latin typeface="Arial"/>
-                <a:ea typeface="Microsoft YaHei"/>
               </a:rPr>
               <a:t>ЛАО-ЦЗЫ</a:t>
             </a:r>
@@ -17021,7 +16799,6 @@
                   <a:srgbClr val="8C7B5F"/>
                 </a:solidFill>
                 <a:latin typeface="Arial"/>
-                <a:ea typeface="Microsoft YaHei"/>
               </a:rPr>
               <a:t>VI—V вв. до н. э.</a:t>
             </a:r>
@@ -17105,7 +16882,6 @@
                   <a:srgbClr val="4A4942"/>
                 </a:solidFill>
                 <a:latin typeface="Arial"/>
-                <a:ea typeface="Microsoft YaHei"/>
               </a:rPr>
               <a:t>Основатель даосизма.</a:t>
             </a:r>
@@ -17122,7 +16898,6 @@
                   <a:srgbClr val="4A4942"/>
                 </a:solidFill>
                 <a:latin typeface="Arial"/>
-                <a:ea typeface="Microsoft YaHei"/>
               </a:rPr>
               <a:t>«Старый учитель»</a:t>
             </a:r>
@@ -17186,7 +16961,6 @@
                   <a:srgbClr val="2A2A24"/>
                 </a:solidFill>
                 <a:latin typeface="Arial"/>
-                <a:ea typeface="Microsoft YaHei"/>
               </a:rPr>
               <a:t>КОНФУЦИЙ</a:t>
             </a:r>
@@ -17226,7 +17000,6 @@
                   <a:srgbClr val="8C7B5F"/>
                 </a:solidFill>
                 <a:latin typeface="Arial"/>
-                <a:ea typeface="Microsoft YaHei"/>
               </a:rPr>
               <a:t>551—479 гг. до н. э.</a:t>
             </a:r>
@@ -17310,7 +17083,6 @@
                   <a:srgbClr val="4A4942"/>
                 </a:solidFill>
                 <a:latin typeface="Arial"/>
-                <a:ea typeface="Microsoft YaHei"/>
               </a:rPr>
               <a:t>Кун Цю, основатель</a:t>
             </a:r>
@@ -17327,7 +17099,6 @@
                   <a:srgbClr val="4A4942"/>
                 </a:solidFill>
                 <a:latin typeface="Arial"/>
-                <a:ea typeface="Microsoft YaHei"/>
               </a:rPr>
               <a:t>конфуцианства</a:t>
             </a:r>
@@ -17411,7 +17182,6 @@
                   <a:srgbClr val="8A8578"/>
                 </a:solidFill>
                 <a:latin typeface="Arial"/>
-                <a:ea typeface="Microsoft YaHei"/>
               </a:rPr>
               <a:t>Современники, заставшие один из самых бурных периодов китайской истории</a:t>
             </a:r>
@@ -17451,7 +17221,6 @@
                   <a:srgbClr val="8A8578"/>
                 </a:solidFill>
                 <a:latin typeface="Arial"/>
-                <a:ea typeface="Microsoft YaHei"/>
               </a:rPr>
               <a:t>ДЕЙСТВУЮЩИЕ ЛИЦА</a:t>
             </a:r>
@@ -17491,7 +17260,6 @@
                   <a:srgbClr val="8A8578"/>
                 </a:solidFill>
                 <a:latin typeface="Arial"/>
-                <a:ea typeface="Microsoft YaHei"/>
               </a:rPr>
               <a:t>03</a:t>
             </a:r>
@@ -17573,7 +17341,6 @@
                   <a:srgbClr val="8A8578"/>
                 </a:solidFill>
                 <a:latin typeface="Arial"/>
-                <a:ea typeface="Microsoft YaHei"/>
               </a:rPr>
               <a:t>СУТЬ РАЗЛИЧИЯ</a:t>
             </a:r>
@@ -17613,7 +17380,6 @@
                   <a:srgbClr val="2A2A24"/>
                 </a:solidFill>
                 <a:latin typeface="Arial"/>
-                <a:ea typeface="Microsoft YaHei"/>
               </a:rPr>
               <a:t>СРАВНИТЕЛЬНЫЙ АНАЛИЗ</a:t>
             </a:r>
@@ -17741,7 +17507,6 @@
                   <a:srgbClr val="C6C0B2"/>
                 </a:solidFill>
                 <a:latin typeface="Arial"/>
-                <a:ea typeface="Microsoft YaHei"/>
               </a:rPr>
               <a:t>道</a:t>
             </a:r>
@@ -17781,7 +17546,6 @@
                   <a:srgbClr val="2C382F"/>
                 </a:solidFill>
                 <a:latin typeface="Arial"/>
-                <a:ea typeface="Microsoft YaHei"/>
               </a:rPr>
               <a:t>ДАОСИЗМ</a:t>
             </a:r>
@@ -17821,7 +17585,6 @@
                   <a:srgbClr val="8A8578"/>
                 </a:solidFill>
                 <a:latin typeface="Arial"/>
-                <a:ea typeface="Microsoft YaHei"/>
               </a:rPr>
               <a:t>ОНТОЛОГИЧЕСКОЕ УЧЕНИЕ</a:t>
             </a:r>
@@ -17861,7 +17624,6 @@
                   <a:srgbClr val="8C7B5F"/>
                 </a:solidFill>
                 <a:latin typeface="Arial"/>
-                <a:ea typeface="Microsoft YaHei"/>
               </a:rPr>
               <a:t>—</a:t>
             </a:r>
@@ -17901,7 +17663,6 @@
                   <a:srgbClr val="2A2A24"/>
                 </a:solidFill>
                 <a:latin typeface="Arial"/>
-                <a:ea typeface="Microsoft YaHei"/>
               </a:rPr>
               <a:t>Учение о бытии и мироустройстве</a:t>
             </a:r>
@@ -17941,7 +17702,6 @@
                   <a:srgbClr val="8C7B5F"/>
                 </a:solidFill>
                 <a:latin typeface="Arial"/>
-                <a:ea typeface="Microsoft YaHei"/>
               </a:rPr>
               <a:t>—</a:t>
             </a:r>
@@ -17981,7 +17741,6 @@
                   <a:srgbClr val="2A2A24"/>
                 </a:solidFill>
                 <a:latin typeface="Arial"/>
-                <a:ea typeface="Microsoft YaHei"/>
               </a:rPr>
               <a:t>Носит наивно-диалектический характер</a:t>
             </a:r>
@@ -18021,7 +17780,6 @@
                   <a:srgbClr val="8C7B5F"/>
                 </a:solidFill>
                 <a:latin typeface="Arial"/>
-                <a:ea typeface="Microsoft YaHei"/>
               </a:rPr>
               <a:t>—</a:t>
             </a:r>
@@ -18061,7 +17819,6 @@
                   <a:srgbClr val="2A2A24"/>
                 </a:solidFill>
                 <a:latin typeface="Arial"/>
-                <a:ea typeface="Microsoft YaHei"/>
               </a:rPr>
               <a:t>Лао-цзы, Чжуан-цзы, Ян Чжу</a:t>
             </a:r>
@@ -18145,7 +17902,6 @@
                   <a:srgbClr val="4A4942"/>
                 </a:solidFill>
                 <a:latin typeface="Arial"/>
-                <a:ea typeface="Microsoft YaHei"/>
               </a:rPr>
               <a:t>Смотрит наверх — на мировой порядок</a:t>
             </a:r>
@@ -18185,7 +17941,6 @@
                   <a:srgbClr val="C6C0B2"/>
                 </a:solidFill>
                 <a:latin typeface="Arial"/>
-                <a:ea typeface="Microsoft YaHei"/>
               </a:rPr>
               <a:t>儒</a:t>
             </a:r>
@@ -18225,7 +17980,6 @@
                   <a:srgbClr val="2C382F"/>
                 </a:solidFill>
                 <a:latin typeface="Arial"/>
-                <a:ea typeface="Microsoft YaHei"/>
               </a:rPr>
               <a:t>КОНФУЦИАНСТВО</a:t>
             </a:r>
@@ -18265,7 +18019,6 @@
                   <a:srgbClr val="8A8578"/>
                 </a:solidFill>
                 <a:latin typeface="Arial"/>
-                <a:ea typeface="Microsoft YaHei"/>
               </a:rPr>
               <a:t>СОЦИАЛЬНО-ЭТИЧЕСКОЕ УЧЕНИЕ</a:t>
             </a:r>
@@ -18305,7 +18058,6 @@
                   <a:srgbClr val="8C7B5F"/>
                 </a:solidFill>
                 <a:latin typeface="Arial"/>
-                <a:ea typeface="Microsoft YaHei"/>
               </a:rPr>
               <a:t>—</a:t>
             </a:r>
@@ -18345,7 +18097,6 @@
                   <a:srgbClr val="2A2A24"/>
                 </a:solidFill>
                 <a:latin typeface="Arial"/>
-                <a:ea typeface="Microsoft YaHei"/>
               </a:rPr>
               <a:t>Учение о человеке, обществе, государстве</a:t>
             </a:r>
@@ -18385,7 +18136,6 @@
                   <a:srgbClr val="8C7B5F"/>
                 </a:solidFill>
                 <a:latin typeface="Arial"/>
-                <a:ea typeface="Microsoft YaHei"/>
               </a:rPr>
               <a:t>—</a:t>
             </a:r>
@@ -18425,7 +18175,6 @@
                   <a:srgbClr val="2A2A24"/>
                 </a:solidFill>
                 <a:latin typeface="Arial"/>
-                <a:ea typeface="Microsoft YaHei"/>
               </a:rPr>
               <a:t>Мораль как основа управления</a:t>
             </a:r>
@@ -18465,7 +18214,6 @@
                   <a:srgbClr val="8C7B5F"/>
                 </a:solidFill>
                 <a:latin typeface="Arial"/>
-                <a:ea typeface="Microsoft YaHei"/>
               </a:rPr>
               <a:t>—</a:t>
             </a:r>
@@ -18505,7 +18253,6 @@
                   <a:srgbClr val="2A2A24"/>
                 </a:solidFill>
                 <a:latin typeface="Arial"/>
-                <a:ea typeface="Microsoft YaHei"/>
               </a:rPr>
               <a:t>Кун Цю, Мэн-цзы, Сюнь-цзы</a:t>
             </a:r>
@@ -18589,7 +18336,6 @@
                   <a:srgbClr val="4A4942"/>
                 </a:solidFill>
                 <a:latin typeface="Arial"/>
-                <a:ea typeface="Microsoft YaHei"/>
               </a:rPr>
               <a:t>Смотрит вокруг — на отношения между людьми</a:t>
             </a:r>
@@ -18629,7 +18375,6 @@
                   <a:srgbClr val="8A8578"/>
                 </a:solidFill>
                 <a:latin typeface="Arial"/>
-                <a:ea typeface="Microsoft YaHei"/>
               </a:rPr>
               <a:t>СУТЬ РАЗЛИЧИЯ</a:t>
             </a:r>
@@ -18669,7 +18414,6 @@
                   <a:srgbClr val="8A8578"/>
                 </a:solidFill>
                 <a:latin typeface="Arial"/>
-                <a:ea typeface="Microsoft YaHei"/>
               </a:rPr>
               <a:t>04</a:t>
             </a:r>
@@ -18751,7 +18495,6 @@
                   <a:srgbClr val="3B493D"/>
                 </a:solidFill>
                 <a:latin typeface="Arial"/>
-                <a:ea typeface="Microsoft YaHei"/>
               </a:rPr>
               <a:t>道</a:t>
             </a:r>
@@ -18791,7 +18534,6 @@
                   <a:srgbClr val="9AA697"/>
                 </a:solidFill>
                 <a:latin typeface="Arial"/>
-                <a:ea typeface="Microsoft YaHei"/>
               </a:rPr>
               <a:t>ЧАСТЬ ПЕРВАЯ</a:t>
             </a:r>
@@ -18831,7 +18573,6 @@
                   <a:srgbClr val="EDE9E1"/>
                 </a:solidFill>
                 <a:latin typeface="Arial"/>
-                <a:ea typeface="Microsoft YaHei"/>
               </a:rPr>
               <a:t>ДАОСИЗМ</a:t>
             </a:r>
@@ -18915,7 +18656,6 @@
                   <a:srgbClr val="C2CBBF"/>
                 </a:solidFill>
                 <a:latin typeface="Arial"/>
-                <a:ea typeface="Microsoft YaHei"/>
               </a:rPr>
               <a:t>Учение о Пути</a:t>
             </a:r>
@@ -18955,7 +18695,6 @@
                   <a:srgbClr val="8C7B5F"/>
                 </a:solidFill>
                 <a:latin typeface="Arial"/>
-                <a:ea typeface="Microsoft YaHei"/>
               </a:rPr>
               <a:t>—</a:t>
             </a:r>
@@ -18995,7 +18734,6 @@
                   <a:srgbClr val="D3D8CF"/>
                 </a:solidFill>
                 <a:latin typeface="Arial"/>
-                <a:ea typeface="Microsoft YaHei"/>
               </a:rPr>
               <a:t>Лао-цзы: биография</a:t>
             </a:r>
@@ -19035,7 +18773,6 @@
                   <a:srgbClr val="8C7B5F"/>
                 </a:solidFill>
                 <a:latin typeface="Arial"/>
-                <a:ea typeface="Microsoft YaHei"/>
               </a:rPr>
               <a:t>—</a:t>
             </a:r>
@@ -19075,7 +18812,6 @@
                   <a:srgbClr val="D3D8CF"/>
                 </a:solidFill>
                 <a:latin typeface="Arial"/>
-                <a:ea typeface="Microsoft YaHei"/>
               </a:rPr>
               <a:t>Дао и Дэ</a:t>
             </a:r>
@@ -19115,7 +18851,6 @@
                   <a:srgbClr val="8C7B5F"/>
                 </a:solidFill>
                 <a:latin typeface="Arial"/>
-                <a:ea typeface="Microsoft YaHei"/>
               </a:rPr>
               <a:t>—</a:t>
             </a:r>
@@ -19155,7 +18890,6 @@
                   <a:srgbClr val="D3D8CF"/>
                 </a:solidFill>
                 <a:latin typeface="Arial"/>
-                <a:ea typeface="Microsoft YaHei"/>
               </a:rPr>
               <a:t>Концепция недеяния</a:t>
             </a:r>
@@ -19195,7 +18929,6 @@
                   <a:srgbClr val="B9C2B6"/>
                 </a:solidFill>
                 <a:latin typeface="Arial"/>
-                <a:ea typeface="Microsoft YaHei"/>
               </a:rPr>
               <a:t>ДАОСИЗМ</a:t>
             </a:r>
@@ -19235,7 +18968,6 @@
                   <a:srgbClr val="B9C2B6"/>
                 </a:solidFill>
                 <a:latin typeface="Arial"/>
-                <a:ea typeface="Microsoft YaHei"/>
               </a:rPr>
               <a:t>05</a:t>
             </a:r>
@@ -19317,7 +19049,6 @@
                   <a:srgbClr val="8A8578"/>
                 </a:solidFill>
                 <a:latin typeface="Arial"/>
-                <a:ea typeface="Microsoft YaHei"/>
               </a:rPr>
               <a:t>ДАОСИЗМ</a:t>
             </a:r>
@@ -19357,7 +19088,6 @@
                   <a:srgbClr val="2A2A24"/>
                 </a:solidFill>
                 <a:latin typeface="Arial"/>
-                <a:ea typeface="Microsoft YaHei"/>
               </a:rPr>
               <a:t>ЛАО-ЦЗЫ: БИОГРАФИЯ</a:t>
             </a:r>
@@ -19441,7 +19171,6 @@
                   <a:srgbClr val="2C382F"/>
                 </a:solidFill>
                 <a:latin typeface="Arial"/>
-                <a:ea typeface="Microsoft YaHei"/>
               </a:rPr>
               <a:t>Достоверных сведений почти нет — есть легенда</a:t>
             </a:r>
@@ -19481,7 +19210,6 @@
                   <a:srgbClr val="8C7B5F"/>
                 </a:solidFill>
                 <a:latin typeface="Arial"/>
-                <a:ea typeface="Microsoft YaHei"/>
               </a:rPr>
               <a:t>—</a:t>
             </a:r>
@@ -19521,7 +19249,6 @@
                   <a:srgbClr val="2A2A24"/>
                 </a:solidFill>
                 <a:latin typeface="Arial"/>
-                <a:ea typeface="Microsoft YaHei"/>
               </a:rPr>
               <a:t>Деревня «Искривлённая доброта» уезда «Горький»</a:t>
             </a:r>
@@ -19561,7 +19288,6 @@
                   <a:srgbClr val="8C7B5F"/>
                 </a:solidFill>
                 <a:latin typeface="Arial"/>
-                <a:ea typeface="Microsoft YaHei"/>
               </a:rPr>
               <a:t>—</a:t>
             </a:r>
@@ -19601,7 +19327,6 @@
                   <a:srgbClr val="2A2A24"/>
                 </a:solidFill>
                 <a:latin typeface="Arial"/>
-                <a:ea typeface="Microsoft YaHei"/>
               </a:rPr>
               <a:t>81 год в чреве матери — вышел уже стариком</a:t>
             </a:r>
@@ -19641,7 +19366,6 @@
                   <a:srgbClr val="8C7B5F"/>
                 </a:solidFill>
                 <a:latin typeface="Arial"/>
-                <a:ea typeface="Microsoft YaHei"/>
               </a:rPr>
               <a:t>—</a:t>
             </a:r>
@@ -19681,7 +19405,6 @@
                   <a:srgbClr val="2A2A24"/>
                 </a:solidFill>
                 <a:latin typeface="Arial"/>
-                <a:ea typeface="Microsoft YaHei"/>
               </a:rPr>
               <a:t>Имя: «Старый учитель» и «Вечный ребёнок»</a:t>
             </a:r>
@@ -19721,7 +19444,6 @@
                   <a:srgbClr val="8C7B5F"/>
                 </a:solidFill>
                 <a:latin typeface="Arial"/>
-                <a:ea typeface="Microsoft YaHei"/>
               </a:rPr>
               <a:t>—</a:t>
             </a:r>
@@ -19761,7 +19483,6 @@
                   <a:srgbClr val="2A2A24"/>
                 </a:solidFill>
                 <a:latin typeface="Arial"/>
-                <a:ea typeface="Microsoft YaHei"/>
               </a:rPr>
               <a:t>Архивариус при дворе правителя Чжоу</a:t>
             </a:r>
@@ -19801,7 +19522,6 @@
                   <a:srgbClr val="8C7B5F"/>
                 </a:solidFill>
                 <a:latin typeface="Arial"/>
-                <a:ea typeface="Microsoft YaHei"/>
               </a:rPr>
               <a:t>—</a:t>
             </a:r>
@@ -19841,7 +19561,6 @@
                   <a:srgbClr val="2A2A24"/>
                 </a:solidFill>
                 <a:latin typeface="Arial"/>
-                <a:ea typeface="Microsoft YaHei"/>
               </a:rPr>
               <a:t>Ушёл на запад на чёрном быке</a:t>
             </a:r>
@@ -19905,7 +19624,6 @@
                   <a:srgbClr val="8A8578"/>
                 </a:solidFill>
                 <a:latin typeface="Arial"/>
-                <a:ea typeface="Microsoft YaHei"/>
               </a:rPr>
               <a:t>Лао-цзы верхом на быке. Традиционная живопись</a:t>
             </a:r>
@@ -20033,7 +19751,6 @@
                   <a:srgbClr val="2C382F"/>
                 </a:solidFill>
                 <a:latin typeface="Arial"/>
-                <a:ea typeface="Microsoft YaHei"/>
               </a:rPr>
               <a:t>«Дао дэ цзин» — трактат в пять тысяч иероглифов, написанный в один присест</a:t>
             </a:r>
@@ -20073,7 +19790,6 @@
                   <a:srgbClr val="8A8578"/>
                 </a:solidFill>
                 <a:latin typeface="Arial"/>
-                <a:ea typeface="Microsoft YaHei"/>
               </a:rPr>
               <a:t>ДАОСИЗМ</a:t>
             </a:r>
@@ -20113,7 +19829,6 @@
                   <a:srgbClr val="8A8578"/>
                 </a:solidFill>
                 <a:latin typeface="Arial"/>
-                <a:ea typeface="Microsoft YaHei"/>
               </a:rPr>
               <a:t>06</a:t>
             </a:r>
@@ -20195,7 +19910,6 @@
                   <a:srgbClr val="8A8578"/>
                 </a:solidFill>
                 <a:latin typeface="Arial"/>
-                <a:ea typeface="Microsoft YaHei"/>
               </a:rPr>
               <a:t>ДАОСИЗМ</a:t>
             </a:r>
@@ -20235,7 +19949,6 @@
                   <a:srgbClr val="2A2A24"/>
                 </a:solidFill>
                 <a:latin typeface="Arial"/>
-                <a:ea typeface="Microsoft YaHei"/>
               </a:rPr>
               <a:t>ДАО И ДЭ — УЧЕНИЕ О ПУТИ</a:t>
             </a:r>
@@ -20343,7 +20056,6 @@
                   <a:srgbClr val="BFB8A8"/>
                 </a:solidFill>
                 <a:latin typeface="Arial"/>
-                <a:ea typeface="Microsoft YaHei"/>
               </a:rPr>
               <a:t>道</a:t>
             </a:r>
@@ -20383,7 +20095,6 @@
                   <a:srgbClr val="2C382F"/>
                 </a:solidFill>
                 <a:latin typeface="Arial"/>
-                <a:ea typeface="Microsoft YaHei"/>
               </a:rPr>
               <a:t>ДАО</a:t>
             </a:r>
@@ -20423,7 +20134,6 @@
                   <a:srgbClr val="8A8578"/>
                 </a:solidFill>
                 <a:latin typeface="Arial"/>
-                <a:ea typeface="Microsoft YaHei"/>
               </a:rPr>
               <a:t>Сущность бытия</a:t>
             </a:r>
@@ -20507,7 +20217,6 @@
                   <a:srgbClr val="8C7B5F"/>
                 </a:solidFill>
                 <a:latin typeface="Arial"/>
-                <a:ea typeface="Microsoft YaHei"/>
               </a:rPr>
               <a:t>—</a:t>
             </a:r>
@@ -20547,7 +20256,6 @@
                   <a:srgbClr val="2A2A24"/>
                 </a:solidFill>
                 <a:latin typeface="Arial"/>
-                <a:ea typeface="Microsoft YaHei"/>
               </a:rPr>
               <a:t>Буквально — путь, дорога</a:t>
             </a:r>
@@ -20587,7 +20295,6 @@
                   <a:srgbClr val="8C7B5F"/>
                 </a:solidFill>
                 <a:latin typeface="Arial"/>
-                <a:ea typeface="Microsoft YaHei"/>
               </a:rPr>
               <a:t>—</a:t>
             </a:r>
@@ -20627,7 +20334,6 @@
                   <a:srgbClr val="2A2A24"/>
                 </a:solidFill>
                 <a:latin typeface="Arial"/>
-                <a:ea typeface="Microsoft YaHei"/>
               </a:rPr>
               <a:t>Великий путь, по которому следует вселенная</a:t>
             </a:r>
@@ -20667,7 +20373,6 @@
                   <a:srgbClr val="8C7B5F"/>
                 </a:solidFill>
                 <a:latin typeface="Arial"/>
-                <a:ea typeface="Microsoft YaHei"/>
               </a:rPr>
               <a:t>—</a:t>
             </a:r>
@@ -20707,7 +20412,6 @@
                   <a:srgbClr val="2A2A24"/>
                 </a:solidFill>
                 <a:latin typeface="Arial"/>
-                <a:ea typeface="Microsoft YaHei"/>
               </a:rPr>
               <a:t>Всеобщий закон и абсолют</a:t>
             </a:r>
@@ -20747,7 +20451,6 @@
                   <a:srgbClr val="8C7B5F"/>
                 </a:solidFill>
                 <a:latin typeface="Arial"/>
-                <a:ea typeface="Microsoft YaHei"/>
               </a:rPr>
               <a:t>—</a:t>
             </a:r>
@@ -20787,7 +20490,6 @@
                   <a:srgbClr val="2A2A24"/>
                 </a:solidFill>
                 <a:latin typeface="Arial"/>
-                <a:ea typeface="Microsoft YaHei"/>
               </a:rPr>
               <a:t>Безгранично, питает собой Дэ</a:t>
             </a:r>
@@ -20827,7 +20529,6 @@
                   <a:srgbClr val="BFB8A8"/>
                 </a:solidFill>
                 <a:latin typeface="Arial"/>
-                <a:ea typeface="Microsoft YaHei"/>
               </a:rPr>
               <a:t>德</a:t>
             </a:r>
@@ -20867,7 +20568,6 @@
                   <a:srgbClr val="2C382F"/>
                 </a:solidFill>
                 <a:latin typeface="Arial"/>
-                <a:ea typeface="Microsoft YaHei"/>
               </a:rPr>
               <a:t>ДЭ</a:t>
             </a:r>
@@ -20907,7 +20607,6 @@
                   <a:srgbClr val="8A8578"/>
                 </a:solidFill>
                 <a:latin typeface="Arial"/>
-                <a:ea typeface="Microsoft YaHei"/>
               </a:rPr>
               <a:t>Проявление Дао</a:t>
             </a:r>
@@ -20991,7 +20690,6 @@
                   <a:srgbClr val="8C7B5F"/>
                 </a:solidFill>
                 <a:latin typeface="Arial"/>
-                <a:ea typeface="Microsoft YaHei"/>
               </a:rPr>
               <a:t>—</a:t>
             </a:r>
@@ -21031,7 +20729,6 @@
                   <a:srgbClr val="2A2A24"/>
                 </a:solidFill>
                 <a:latin typeface="Arial"/>
-                <a:ea typeface="Microsoft YaHei"/>
               </a:rPr>
               <a:t>Благо, через которое Дао себя проявляет</a:t>
             </a:r>
@@ -21071,7 +20768,6 @@
                   <a:srgbClr val="8C7B5F"/>
                 </a:solidFill>
                 <a:latin typeface="Arial"/>
-                <a:ea typeface="Microsoft YaHei"/>
               </a:rPr>
               <a:t>—</a:t>
             </a:r>
@@ -21111,7 +20807,6 @@
                   <a:srgbClr val="2A2A24"/>
                 </a:solidFill>
                 <a:latin typeface="Arial"/>
-                <a:ea typeface="Microsoft YaHei"/>
               </a:rPr>
               <a:t>Конкретный способ бытия</a:t>
             </a:r>
@@ -21151,7 +20846,6 @@
                   <a:srgbClr val="8C7B5F"/>
                 </a:solidFill>
                 <a:latin typeface="Arial"/>
-                <a:ea typeface="Microsoft YaHei"/>
               </a:rPr>
               <a:t>—</a:t>
             </a:r>
@@ -21191,7 +20885,6 @@
                   <a:srgbClr val="2A2A24"/>
                 </a:solidFill>
                 <a:latin typeface="Arial"/>
-                <a:ea typeface="Microsoft YaHei"/>
               </a:rPr>
               <a:t>Ближе к человеку и его поступкам</a:t>
             </a:r>
@@ -21231,7 +20924,6 @@
                   <a:srgbClr val="8C7B5F"/>
                 </a:solidFill>
                 <a:latin typeface="Arial"/>
-                <a:ea typeface="Microsoft YaHei"/>
               </a:rPr>
               <a:t>—</a:t>
             </a:r>
@@ -21271,7 +20963,6 @@
                   <a:srgbClr val="2A2A24"/>
                 </a:solidFill>
                 <a:latin typeface="Arial"/>
-                <a:ea typeface="Microsoft YaHei"/>
               </a:rPr>
               <a:t>Определено</a:t>
             </a:r>
@@ -21355,7 +21046,6 @@
                   <a:srgbClr val="2C382F"/>
                 </a:solidFill>
                 <a:latin typeface="Arial"/>
-                <a:ea typeface="Microsoft YaHei"/>
               </a:rPr>
               <a:t>«Тот, кто в делах следует Дао и очищает свой дух, вступает в союз с силой Дэ»</a:t>
             </a:r>
@@ -21395,7 +21085,6 @@
                   <a:srgbClr val="8A8578"/>
                 </a:solidFill>
                 <a:latin typeface="Arial"/>
-                <a:ea typeface="Microsoft YaHei"/>
               </a:rPr>
               <a:t>ДАОСИЗМ</a:t>
             </a:r>
@@ -21435,7 +21124,6 @@
                   <a:srgbClr val="8A8578"/>
                 </a:solidFill>
                 <a:latin typeface="Arial"/>
-                <a:ea typeface="Microsoft YaHei"/>
               </a:rPr>
               <a:t>07</a:t>
             </a:r>
@@ -21517,7 +21205,6 @@
                   <a:srgbClr val="8A8578"/>
                 </a:solidFill>
                 <a:latin typeface="Arial"/>
-                <a:ea typeface="Microsoft YaHei"/>
               </a:rPr>
               <a:t>ДАОСИЗМ · ЦИТАТЫ</a:t>
             </a:r>
@@ -21557,7 +21244,6 @@
                   <a:srgbClr val="2A2A24"/>
                 </a:solidFill>
                 <a:latin typeface="Arial"/>
-                <a:ea typeface="Microsoft YaHei"/>
               </a:rPr>
               <a:t>«Дерево толщиной в обхват вырастает из крошечного зёрнышка.</a:t>
             </a:r>
@@ -21574,7 +21260,6 @@
                   <a:srgbClr val="2A2A24"/>
                 </a:solidFill>
                 <a:latin typeface="Arial"/>
-                <a:ea typeface="Microsoft YaHei"/>
               </a:rPr>
               <a:t>Башня в девять этажей вырастает из груды земли.</a:t>
             </a:r>
@@ -21591,7 +21276,6 @@
                   <a:srgbClr val="2A2A24"/>
                 </a:solidFill>
                 <a:latin typeface="Arial"/>
-                <a:ea typeface="Microsoft YaHei"/>
               </a:rPr>
               <a:t>Путь длиной в тысячу ли начинается у тебя под ногами.»</a:t>
             </a:r>
@@ -21675,7 +21359,6 @@
                   <a:srgbClr val="2C382F"/>
                 </a:solidFill>
                 <a:latin typeface="Arial"/>
-                <a:ea typeface="Microsoft YaHei"/>
               </a:rPr>
               <a:t>ЛАО-ЦЗЫ</a:t>
             </a:r>
@@ -21715,7 +21398,6 @@
                   <a:srgbClr val="4A4942"/>
                 </a:solidFill>
                 <a:latin typeface="Arial"/>
-                <a:ea typeface="Microsoft YaHei"/>
               </a:rPr>
               <a:t>«Осуществляй то, чего ещё нет, управляй тем, что ещё не противится»</a:t>
             </a:r>
@@ -21755,7 +21437,6 @@
                   <a:srgbClr val="8A8578"/>
                 </a:solidFill>
                 <a:latin typeface="Arial"/>
-                <a:ea typeface="Microsoft YaHei"/>
               </a:rPr>
               <a:t>Великое рождается из малого: действие согласуется с ходом вещей, а не навязано ему</a:t>
             </a:r>
@@ -21795,7 +21476,6 @@
                   <a:srgbClr val="8A8578"/>
                 </a:solidFill>
                 <a:latin typeface="Arial"/>
-                <a:ea typeface="Microsoft YaHei"/>
               </a:rPr>
               <a:t>ДАОСИЗМ · ЦИТАТЫ</a:t>
             </a:r>
@@ -21835,7 +21515,6 @@
                   <a:srgbClr val="8A8578"/>
                 </a:solidFill>
                 <a:latin typeface="Arial"/>
-                <a:ea typeface="Microsoft YaHei"/>
               </a:rPr>
               <a:t>08</a:t>
             </a:r>
@@ -21917,7 +21596,6 @@
                   <a:srgbClr val="8A8578"/>
                 </a:solidFill>
                 <a:latin typeface="Arial"/>
-                <a:ea typeface="Microsoft YaHei"/>
               </a:rPr>
               <a:t>ДАОСИЗМ</a:t>
             </a:r>
@@ -21957,7 +21635,6 @@
                   <a:srgbClr val="2A2A24"/>
                 </a:solidFill>
                 <a:latin typeface="Arial"/>
-                <a:ea typeface="Microsoft YaHei"/>
               </a:rPr>
               <a:t>КОНЦЕПЦИЯ НЕДЕЯНИЯ</a:t>
             </a:r>
@@ -22041,7 +21718,6 @@
                   <a:srgbClr val="2C382F"/>
                 </a:solidFill>
                 <a:latin typeface="Arial"/>
-                <a:ea typeface="Microsoft YaHei"/>
               </a:rPr>
               <a:t>У-ВЭЙ — отрицание деятельности, идущей вразрез с миропорядком</a:t>
             </a:r>
@@ -22081,7 +21757,6 @@
                   <a:srgbClr val="8C7B5F"/>
                 </a:solidFill>
                 <a:latin typeface="Arial"/>
-                <a:ea typeface="Microsoft YaHei"/>
               </a:rPr>
               <a:t>—</a:t>
             </a:r>
@@ -22121,7 +21796,6 @@
                   <a:srgbClr val="2A2A24"/>
                 </a:solidFill>
                 <a:latin typeface="Arial"/>
-                <a:ea typeface="Microsoft YaHei"/>
               </a:rPr>
               <a:t>Не бездействие, а отказ от насилия над естественным ходом вещей</a:t>
             </a:r>
@@ -22161,7 +21835,6 @@
                   <a:srgbClr val="8C7B5F"/>
                 </a:solidFill>
                 <a:latin typeface="Arial"/>
-                <a:ea typeface="Microsoft YaHei"/>
               </a:rPr>
               <a:t>—</a:t>
             </a:r>
@@ -22201,7 +21874,6 @@
                   <a:srgbClr val="2A2A24"/>
                 </a:solidFill>
                 <a:latin typeface="Arial"/>
-                <a:ea typeface="Microsoft YaHei"/>
               </a:rPr>
               <a:t>Лучший государь — тот, который ничего не делает для подданных</a:t>
             </a:r>
@@ -22241,7 +21913,6 @@
                   <a:srgbClr val="8C7B5F"/>
                 </a:solidFill>
                 <a:latin typeface="Arial"/>
-                <a:ea typeface="Microsoft YaHei"/>
               </a:rPr>
               <a:t>—</a:t>
             </a:r>
@@ -22281,7 +21952,6 @@
                   <a:srgbClr val="2A2A24"/>
                 </a:solidFill>
                 <a:latin typeface="Arial"/>
-                <a:ea typeface="Microsoft YaHei"/>
               </a:rPr>
               <a:t>Задача власти — гармонизировать отношения и предотвращать смуту</a:t>
             </a:r>
@@ -22321,7 +21991,6 @@
                   <a:srgbClr val="8C7B5F"/>
                 </a:solidFill>
                 <a:latin typeface="Arial"/>
-                <a:ea typeface="Microsoft YaHei"/>
               </a:rPr>
               <a:t>—</a:t>
             </a:r>
@@ -22361,7 +22030,6 @@
                   <a:srgbClr val="2A2A24"/>
                 </a:solidFill>
                 <a:latin typeface="Arial"/>
-                <a:ea typeface="Microsoft YaHei"/>
               </a:rPr>
               <a:t>Подданные сами разберутся, что им делать</a:t>
             </a:r>
@@ -22426,7 +22094,6 @@
                   <a:srgbClr val="8A8578"/>
                 </a:solidFill>
                 <a:latin typeface="Arial"/>
-                <a:ea typeface="Microsoft YaHei"/>
               </a:rPr>
               <a:t>Каменная скульптура Лао-цзы к северу от г. Цюаньчжоу, Китай</a:t>
             </a:r>
@@ -22554,7 +22221,6 @@
                   <a:srgbClr val="2C382F"/>
                 </a:solidFill>
                 <a:latin typeface="Arial"/>
-                <a:ea typeface="Microsoft YaHei"/>
               </a:rPr>
               <a:t>Идеальная власть — почти незаметна</a:t>
             </a:r>
@@ -22594,7 +22260,6 @@
                   <a:srgbClr val="8A8578"/>
                 </a:solidFill>
                 <a:latin typeface="Arial"/>
-                <a:ea typeface="Microsoft YaHei"/>
               </a:rPr>
               <a:t>ДАОСИЗМ</a:t>
             </a:r>
@@ -22634,7 +22299,6 @@
                   <a:srgbClr val="8A8578"/>
                 </a:solidFill>
                 <a:latin typeface="Arial"/>
-                <a:ea typeface="Microsoft YaHei"/>
               </a:rPr>
               <a:t>09</a:t>
             </a:r>

--- a/presentations/kitajskaya-filosofiya/out/kitajskaya-filosofiya.pptx
+++ b/presentations/kitajskaya-filosofiya/out/kitajskaya-filosofiya.pptx
@@ -5226,7 +5226,7 @@
         <p:spPr>
           <a:xfrm>
             <a:off x="868680" y="4151376"/>
-            <a:ext cx="6035040" cy="1463040"/>
+            <a:ext cx="6035040" cy="1316736"/>
           </a:xfrm>
           <a:prstGeom prst="rect">
             <a:avLst/>
@@ -5280,7 +5280,7 @@
         </p:nvSpPr>
         <p:spPr>
           <a:xfrm>
-            <a:off x="868680" y="5504688"/>
+            <a:off x="868680" y="5539232"/>
             <a:ext cx="1828800" cy="12801"/>
           </a:xfrm>
           <a:prstGeom prst="rect">
@@ -5324,7 +5324,7 @@
         </p:nvSpPr>
         <p:spPr>
           <a:xfrm>
-            <a:off x="868680" y="5705856"/>
+            <a:off x="868680" y="5740400"/>
             <a:ext cx="5486400" cy="365760"/>
           </a:xfrm>
           <a:prstGeom prst="rect">
